--- a/GuilhermeBackLucasFritzke/Template_Simnario_Guilherme_Lucas.pptx
+++ b/GuilhermeBackLucasFritzke/Template_Simnario_Guilherme_Lucas.pptx
@@ -8,11 +8,13 @@
     <p:sldId id="256" r:id="rId2"/>
     <p:sldId id="257" r:id="rId3"/>
     <p:sldId id="258" r:id="rId4"/>
-    <p:sldId id="263" r:id="rId5"/>
-    <p:sldId id="259" r:id="rId6"/>
-    <p:sldId id="260" r:id="rId7"/>
-    <p:sldId id="261" r:id="rId8"/>
-    <p:sldId id="262" r:id="rId9"/>
+    <p:sldId id="264" r:id="rId5"/>
+    <p:sldId id="265" r:id="rId6"/>
+    <p:sldId id="263" r:id="rId7"/>
+    <p:sldId id="259" r:id="rId8"/>
+    <p:sldId id="260" r:id="rId9"/>
+    <p:sldId id="261" r:id="rId10"/>
+    <p:sldId id="262" r:id="rId11"/>
   </p:sldIdLst>
   <p:sldSz cx="12192000" cy="6858000"/>
   <p:notesSz cx="6858000" cy="9144000"/>
@@ -111,6 +113,11 @@
       </a:defRPr>
     </a:lvl9pPr>
   </p:defaultTextStyle>
+  <p:extLst>
+    <p:ext uri="{EFAFB233-063F-42B5-8137-9DF3F51BA10A}">
+      <p15:sldGuideLst xmlns:p15="http://schemas.microsoft.com/office/powerpoint/2012/main"/>
+    </p:ext>
+  </p:extLst>
 </p:presentation>
 </file>
 
@@ -775,7 +782,7 @@
         <p:spPr>
           <a:xfrm>
             <a:off x="7630677" y="3993765"/>
-            <a:ext cx="3492345" cy="369332"/>
+            <a:ext cx="3492345" cy="646331"/>
           </a:xfrm>
           <a:prstGeom prst="rect">
             <a:avLst/>
@@ -798,7 +805,7 @@
                   </a:schemeClr>
                 </a:solidFill>
               </a:rPr>
-              <a:t>Autores:</a:t>
+              <a:t>Autores: Guilherme W. Back e Lucas Fritzke</a:t>
             </a:r>
           </a:p>
         </p:txBody>
@@ -850,6 +857,85 @@
     <p:extLst>
       <p:ext uri="{BB962C8B-B14F-4D97-AF65-F5344CB8AC3E}">
         <p14:creationId xmlns:p14="http://schemas.microsoft.com/office/powerpoint/2010/main" val="6529298"/>
+      </p:ext>
+    </p:extLst>
+  </p:cSld>
+  <p:clrMapOvr>
+    <a:masterClrMapping/>
+  </p:clrMapOvr>
+</p:sld>
+</file>
+
+<file path=ppt/slides/slide10.xml><?xml version="1.0" encoding="utf-8"?>
+<p:sld xmlns:a="http://schemas.openxmlformats.org/drawingml/2006/main" xmlns:r="http://schemas.openxmlformats.org/officeDocument/2006/relationships" xmlns:p="http://schemas.openxmlformats.org/presentationml/2006/main">
+  <p:cSld>
+    <p:spTree>
+      <p:nvGrpSpPr>
+        <p:cNvPr id="1" name="">
+          <a:extLst>
+            <a:ext uri="{FF2B5EF4-FFF2-40B4-BE49-F238E27FC236}">
+              <a16:creationId xmlns:a16="http://schemas.microsoft.com/office/drawing/2014/main" id="{7B50B3F0-BC85-C350-CE74-951AA51A84DC}"/>
+            </a:ext>
+          </a:extLst>
+        </p:cNvPr>
+        <p:cNvGrpSpPr/>
+        <p:nvPr/>
+      </p:nvGrpSpPr>
+      <p:grpSpPr>
+        <a:xfrm>
+          <a:off x="0" y="0"/>
+          <a:ext cx="0" cy="0"/>
+          <a:chOff x="0" y="0"/>
+          <a:chExt cx="0" cy="0"/>
+        </a:xfrm>
+      </p:grpSpPr>
+      <p:sp>
+        <p:nvSpPr>
+          <p:cNvPr id="2" name="CaixaDeTexto 1">
+            <a:extLst>
+              <a:ext uri="{FF2B5EF4-FFF2-40B4-BE49-F238E27FC236}">
+                <a16:creationId xmlns:a16="http://schemas.microsoft.com/office/drawing/2014/main" id="{5168FC49-E03F-BACA-EC63-7EF8D148230E}"/>
+              </a:ext>
+            </a:extLst>
+          </p:cNvPr>
+          <p:cNvSpPr txBox="1"/>
+          <p:nvPr/>
+        </p:nvSpPr>
+        <p:spPr>
+          <a:xfrm>
+            <a:off x="2480387" y="2957805"/>
+            <a:ext cx="7231225" cy="769441"/>
+          </a:xfrm>
+          <a:prstGeom prst="rect">
+            <a:avLst/>
+          </a:prstGeom>
+          <a:noFill/>
+        </p:spPr>
+        <p:txBody>
+          <a:bodyPr wrap="square" rtlCol="0">
+            <a:spAutoFit/>
+          </a:bodyPr>
+          <a:lstStyle/>
+          <a:p>
+            <a:pPr algn="ctr"/>
+            <a:r>
+              <a:rPr lang="pt-BR" sz="4400" b="1" dirty="0">
+                <a:solidFill>
+                  <a:schemeClr val="tx2">
+                    <a:lumMod val="90000"/>
+                    <a:lumOff val="10000"/>
+                  </a:schemeClr>
+                </a:solidFill>
+              </a:rPr>
+              <a:t>6. Observação</a:t>
+            </a:r>
+          </a:p>
+        </p:txBody>
+      </p:sp>
+    </p:spTree>
+    <p:extLst>
+      <p:ext uri="{BB962C8B-B14F-4D97-AF65-F5344CB8AC3E}">
+        <p14:creationId xmlns:p14="http://schemas.microsoft.com/office/powerpoint/2010/main" val="3101183892"/>
       </p:ext>
     </p:extLst>
   </p:cSld>
@@ -1763,7 +1849,7 @@
                         <a:buNone/>
                       </a:pPr>
                       <a:r>
-                        <a:rPr lang="pt-BR" sz="1500">
+                        <a:rPr lang="pt-BR" sz="1500" dirty="0">
                           <a:solidFill>
                             <a:schemeClr val="tx2">
                               <a:lumMod val="90000"/>
@@ -2575,6 +2661,3994 @@
         <p:cNvPr id="1" name="">
           <a:extLst>
             <a:ext uri="{FF2B5EF4-FFF2-40B4-BE49-F238E27FC236}">
+              <a16:creationId xmlns:a16="http://schemas.microsoft.com/office/drawing/2014/main" id="{45B3B92D-B05C-9361-9A3A-327B5745CA35}"/>
+            </a:ext>
+          </a:extLst>
+        </p:cNvPr>
+        <p:cNvGrpSpPr/>
+        <p:nvPr/>
+      </p:nvGrpSpPr>
+      <p:grpSpPr>
+        <a:xfrm>
+          <a:off x="0" y="0"/>
+          <a:ext cx="0" cy="0"/>
+          <a:chOff x="0" y="0"/>
+          <a:chExt cx="0" cy="0"/>
+        </a:xfrm>
+      </p:grpSpPr>
+      <p:sp>
+        <p:nvSpPr>
+          <p:cNvPr id="2" name="CaixaDeTexto 1">
+            <a:extLst>
+              <a:ext uri="{FF2B5EF4-FFF2-40B4-BE49-F238E27FC236}">
+                <a16:creationId xmlns:a16="http://schemas.microsoft.com/office/drawing/2014/main" id="{693018B4-D443-47CA-E977-7071909C5C0C}"/>
+              </a:ext>
+            </a:extLst>
+          </p:cNvPr>
+          <p:cNvSpPr txBox="1"/>
+          <p:nvPr/>
+        </p:nvSpPr>
+        <p:spPr>
+          <a:xfrm>
+            <a:off x="496646" y="1146469"/>
+            <a:ext cx="10647786" cy="523220"/>
+          </a:xfrm>
+          <a:prstGeom prst="rect">
+            <a:avLst/>
+          </a:prstGeom>
+          <a:noFill/>
+        </p:spPr>
+        <p:txBody>
+          <a:bodyPr wrap="square" rtlCol="0">
+            <a:spAutoFit/>
+          </a:bodyPr>
+          <a:lstStyle/>
+          <a:p>
+            <a:pPr algn="just"/>
+            <a:r>
+              <a:rPr lang="pt-BR" sz="2800" b="1" dirty="0">
+                <a:solidFill>
+                  <a:schemeClr val="tx2">
+                    <a:lumMod val="90000"/>
+                    <a:lumOff val="10000"/>
+                  </a:schemeClr>
+                </a:solidFill>
+              </a:rPr>
+              <a:t>1.1 </a:t>
+            </a:r>
+            <a:r>
+              <a:rPr lang="en-US" sz="2800" b="1" dirty="0" err="1">
+                <a:solidFill>
+                  <a:schemeClr val="tx2">
+                    <a:lumMod val="90000"/>
+                    <a:lumOff val="10000"/>
+                  </a:schemeClr>
+                </a:solidFill>
+              </a:rPr>
+              <a:t>Delimitação</a:t>
+            </a:r>
+            <a:r>
+              <a:rPr lang="en-US" sz="2800" b="1" dirty="0">
+                <a:solidFill>
+                  <a:schemeClr val="tx2">
+                    <a:lumMod val="90000"/>
+                    <a:lumOff val="10000"/>
+                  </a:schemeClr>
+                </a:solidFill>
+              </a:rPr>
+              <a:t> do Sistema de </a:t>
+            </a:r>
+            <a:r>
+              <a:rPr lang="en-US" sz="2800" b="1" dirty="0" err="1">
+                <a:solidFill>
+                  <a:schemeClr val="tx2">
+                    <a:lumMod val="90000"/>
+                    <a:lumOff val="10000"/>
+                  </a:schemeClr>
+                </a:solidFill>
+              </a:rPr>
+              <a:t>Referência</a:t>
+            </a:r>
+            <a:r>
+              <a:rPr lang="en-US" sz="2800" b="1" dirty="0">
+                <a:solidFill>
+                  <a:schemeClr val="tx2">
+                    <a:lumMod val="90000"/>
+                    <a:lumOff val="10000"/>
+                  </a:schemeClr>
+                </a:solidFill>
+              </a:rPr>
+              <a:t> (S)</a:t>
+            </a:r>
+          </a:p>
+        </p:txBody>
+      </p:sp>
+      <p:sp>
+        <p:nvSpPr>
+          <p:cNvPr id="4" name="CaixaDeTexto 3">
+            <a:extLst>
+              <a:ext uri="{FF2B5EF4-FFF2-40B4-BE49-F238E27FC236}">
+                <a16:creationId xmlns:a16="http://schemas.microsoft.com/office/drawing/2014/main" id="{AEAA23C0-E94E-5446-8FFB-3AC8EDE1FBE6}"/>
+              </a:ext>
+            </a:extLst>
+          </p:cNvPr>
+          <p:cNvSpPr txBox="1"/>
+          <p:nvPr/>
+        </p:nvSpPr>
+        <p:spPr>
+          <a:xfrm>
+            <a:off x="496646" y="1762175"/>
+            <a:ext cx="10568320" cy="369332"/>
+          </a:xfrm>
+          <a:prstGeom prst="rect">
+            <a:avLst/>
+          </a:prstGeom>
+          <a:noFill/>
+        </p:spPr>
+        <p:txBody>
+          <a:bodyPr wrap="square">
+            <a:spAutoFit/>
+          </a:bodyPr>
+          <a:lstStyle/>
+          <a:p>
+            <a:pPr marL="0" indent="0">
+              <a:buNone/>
+            </a:pPr>
+            <a:r>
+              <a:rPr lang="en-US" sz="1800" i="1" dirty="0" err="1">
+                <a:solidFill>
+                  <a:srgbClr val="156082"/>
+                </a:solidFill>
+                <a:ea typeface="Calibri" pitchFamily="34" charset="-122"/>
+                <a:cs typeface="Calibri" pitchFamily="34" charset="-120"/>
+              </a:rPr>
+              <a:t>Fenômeno</a:t>
+            </a:r>
+            <a:r>
+              <a:rPr lang="en-US" sz="1800" i="1" dirty="0">
+                <a:solidFill>
+                  <a:srgbClr val="156082"/>
+                </a:solidFill>
+                <a:ea typeface="Calibri" pitchFamily="34" charset="-122"/>
+                <a:cs typeface="Calibri" pitchFamily="34" charset="-120"/>
+              </a:rPr>
+              <a:t>: </a:t>
+            </a:r>
+            <a:r>
+              <a:rPr lang="en-US" sz="1800" i="1" dirty="0" err="1">
+                <a:solidFill>
+                  <a:srgbClr val="156082"/>
+                </a:solidFill>
+                <a:ea typeface="Calibri" pitchFamily="34" charset="-122"/>
+                <a:cs typeface="Calibri" pitchFamily="34" charset="-120"/>
+              </a:rPr>
+              <a:t>Evacuação</a:t>
+            </a:r>
+            <a:r>
+              <a:rPr lang="en-US" sz="1800" i="1" dirty="0">
+                <a:solidFill>
+                  <a:srgbClr val="156082"/>
+                </a:solidFill>
+                <a:ea typeface="Calibri" pitchFamily="34" charset="-122"/>
+                <a:cs typeface="Calibri" pitchFamily="34" charset="-120"/>
+              </a:rPr>
+              <a:t> </a:t>
+            </a:r>
+            <a:r>
+              <a:rPr lang="en-US" sz="1800" i="1" dirty="0" err="1">
+                <a:solidFill>
+                  <a:srgbClr val="156082"/>
+                </a:solidFill>
+                <a:ea typeface="Calibri" pitchFamily="34" charset="-122"/>
+                <a:cs typeface="Calibri" pitchFamily="34" charset="-120"/>
+              </a:rPr>
+              <a:t>emergencial</a:t>
+            </a:r>
+            <a:r>
+              <a:rPr lang="en-US" sz="1800" i="1" dirty="0">
+                <a:solidFill>
+                  <a:srgbClr val="156082"/>
+                </a:solidFill>
+                <a:ea typeface="Calibri" pitchFamily="34" charset="-122"/>
+                <a:cs typeface="Calibri" pitchFamily="34" charset="-120"/>
+              </a:rPr>
+              <a:t> de </a:t>
+            </a:r>
+            <a:r>
+              <a:rPr lang="en-US" sz="1800" i="1" dirty="0" err="1">
+                <a:solidFill>
+                  <a:srgbClr val="156082"/>
+                </a:solidFill>
+                <a:ea typeface="Calibri" pitchFamily="34" charset="-122"/>
+                <a:cs typeface="Calibri" pitchFamily="34" charset="-120"/>
+              </a:rPr>
+              <a:t>edifício</a:t>
+            </a:r>
+            <a:r>
+              <a:rPr lang="en-US" sz="1800" i="1" dirty="0">
+                <a:solidFill>
+                  <a:srgbClr val="156082"/>
+                </a:solidFill>
+                <a:ea typeface="Calibri" pitchFamily="34" charset="-122"/>
+                <a:cs typeface="Calibri" pitchFamily="34" charset="-120"/>
+              </a:rPr>
+              <a:t> de 30 </a:t>
+            </a:r>
+            <a:r>
+              <a:rPr lang="en-US" sz="1800" i="1" dirty="0" err="1">
+                <a:solidFill>
+                  <a:srgbClr val="156082"/>
+                </a:solidFill>
+                <a:ea typeface="Calibri" pitchFamily="34" charset="-122"/>
+                <a:cs typeface="Calibri" pitchFamily="34" charset="-120"/>
+              </a:rPr>
+              <a:t>andares</a:t>
+            </a:r>
+            <a:r>
+              <a:rPr lang="en-US" sz="1800" i="1" dirty="0">
+                <a:solidFill>
+                  <a:srgbClr val="156082"/>
+                </a:solidFill>
+                <a:ea typeface="Calibri" pitchFamily="34" charset="-122"/>
+                <a:cs typeface="Calibri" pitchFamily="34" charset="-120"/>
+              </a:rPr>
+              <a:t> </a:t>
+            </a:r>
+            <a:r>
+              <a:rPr lang="en-US" sz="1800" i="1" dirty="0" err="1">
+                <a:solidFill>
+                  <a:srgbClr val="156082"/>
+                </a:solidFill>
+                <a:ea typeface="Calibri" pitchFamily="34" charset="-122"/>
+                <a:cs typeface="Calibri" pitchFamily="34" charset="-120"/>
+              </a:rPr>
+              <a:t>em</a:t>
+            </a:r>
+            <a:r>
+              <a:rPr lang="en-US" sz="1800" i="1" dirty="0">
+                <a:solidFill>
+                  <a:srgbClr val="156082"/>
+                </a:solidFill>
+                <a:ea typeface="Calibri" pitchFamily="34" charset="-122"/>
+                <a:cs typeface="Calibri" pitchFamily="34" charset="-120"/>
+              </a:rPr>
+              <a:t> </a:t>
+            </a:r>
+            <a:r>
+              <a:rPr lang="en-US" sz="1800" i="1" dirty="0" err="1">
+                <a:solidFill>
+                  <a:srgbClr val="156082"/>
+                </a:solidFill>
+                <a:ea typeface="Calibri" pitchFamily="34" charset="-122"/>
+                <a:cs typeface="Calibri" pitchFamily="34" charset="-120"/>
+              </a:rPr>
+              <a:t>situação</a:t>
+            </a:r>
+            <a:r>
+              <a:rPr lang="en-US" sz="1800" i="1" dirty="0">
+                <a:solidFill>
+                  <a:srgbClr val="156082"/>
+                </a:solidFill>
+                <a:ea typeface="Calibri" pitchFamily="34" charset="-122"/>
+                <a:cs typeface="Calibri" pitchFamily="34" charset="-120"/>
+              </a:rPr>
+              <a:t> de </a:t>
+            </a:r>
+            <a:r>
+              <a:rPr lang="en-US" sz="1800" i="1" dirty="0" err="1">
+                <a:solidFill>
+                  <a:srgbClr val="156082"/>
+                </a:solidFill>
+                <a:ea typeface="Calibri" pitchFamily="34" charset="-122"/>
+                <a:cs typeface="Calibri" pitchFamily="34" charset="-120"/>
+              </a:rPr>
+              <a:t>incêndio</a:t>
+            </a:r>
+            <a:endParaRPr lang="en-US" sz="1800" dirty="0"/>
+          </a:p>
+        </p:txBody>
+      </p:sp>
+      <p:graphicFrame>
+        <p:nvGraphicFramePr>
+          <p:cNvPr id="5" name="Tabela 4">
+            <a:extLst>
+              <a:ext uri="{FF2B5EF4-FFF2-40B4-BE49-F238E27FC236}">
+                <a16:creationId xmlns:a16="http://schemas.microsoft.com/office/drawing/2014/main" id="{53B20AF9-A18E-DC89-B52E-6249DD208210}"/>
+              </a:ext>
+            </a:extLst>
+          </p:cNvPr>
+          <p:cNvGraphicFramePr>
+            <a:graphicFrameLocks noGrp="1"/>
+          </p:cNvGraphicFramePr>
+          <p:nvPr>
+            <p:extLst>
+              <p:ext uri="{D42A27DB-BD31-4B8C-83A1-F6EECF244321}">
+                <p14:modId xmlns:p14="http://schemas.microsoft.com/office/powerpoint/2010/main" val="2930237112"/>
+              </p:ext>
+            </p:extLst>
+          </p:nvPr>
+        </p:nvGraphicFramePr>
+        <p:xfrm>
+          <a:off x="609600" y="2316480"/>
+          <a:ext cx="11297920" cy="4287519"/>
+        </p:xfrm>
+        <a:graphic>
+          <a:graphicData uri="http://schemas.openxmlformats.org/drawingml/2006/table">
+            <a:tbl>
+              <a:tblPr/>
+              <a:tblGrid>
+                <a:gridCol w="2824481">
+                  <a:extLst>
+                    <a:ext uri="{9D8B030D-6E8A-4147-A177-3AD203B41FA5}">
+                      <a16:colId xmlns:a16="http://schemas.microsoft.com/office/drawing/2014/main" val="1113624060"/>
+                    </a:ext>
+                  </a:extLst>
+                </a:gridCol>
+                <a:gridCol w="8473439">
+                  <a:extLst>
+                    <a:ext uri="{9D8B030D-6E8A-4147-A177-3AD203B41FA5}">
+                      <a16:colId xmlns:a16="http://schemas.microsoft.com/office/drawing/2014/main" val="2867945562"/>
+                    </a:ext>
+                  </a:extLst>
+                </a:gridCol>
+              </a:tblGrid>
+              <a:tr h="379570">
+                <a:tc>
+                  <a:txBody>
+                    <a:bodyPr/>
+                    <a:lstStyle/>
+                    <a:p>
+                      <a:pPr marL="0" indent="0" algn="l">
+                        <a:buNone/>
+                      </a:pPr>
+                      <a:r>
+                        <a:rPr lang="en-US" sz="1800" b="1" dirty="0">
+                          <a:solidFill>
+                            <a:srgbClr val="FFFFFF"/>
+                          </a:solidFill>
+                          <a:latin typeface="+mn-lt"/>
+                          <a:ea typeface="Calibri" pitchFamily="34" charset="-122"/>
+                          <a:cs typeface="Calibri" pitchFamily="34" charset="-120"/>
+                        </a:rPr>
+                        <a:t>Critério</a:t>
+                      </a:r>
+                      <a:endParaRPr lang="en-US" sz="1800" dirty="0">
+                        <a:latin typeface="+mn-lt"/>
+                        <a:ea typeface="Calibri" charset="0"/>
+                        <a:cs typeface="Calibri" charset="0"/>
+                      </a:endParaRPr>
+                    </a:p>
+                  </a:txBody>
+                  <a:tcPr marL="76200" marR="76200" marT="50800" marB="50800" anchor="ctr">
+                    <a:lnL w="12700" cap="flat" cmpd="sng" algn="ctr">
+                      <a:solidFill>
+                        <a:schemeClr val="tx1"/>
+                      </a:solidFill>
+                      <a:prstDash val="solid"/>
+                      <a:round/>
+                      <a:headEnd type="none" w="med" len="med"/>
+                      <a:tailEnd type="none" w="med" len="med"/>
+                    </a:lnL>
+                    <a:lnR w="12700" cap="flat" cmpd="sng" algn="ctr">
+                      <a:solidFill>
+                        <a:schemeClr val="tx1"/>
+                      </a:solidFill>
+                      <a:prstDash val="solid"/>
+                      <a:round/>
+                      <a:headEnd type="none" w="med" len="med"/>
+                      <a:tailEnd type="none" w="med" len="med"/>
+                    </a:lnR>
+                    <a:lnT w="12700" cap="flat" cmpd="sng" algn="ctr">
+                      <a:solidFill>
+                        <a:schemeClr val="tx1"/>
+                      </a:solidFill>
+                      <a:prstDash val="solid"/>
+                      <a:round/>
+                      <a:headEnd type="none" w="med" len="med"/>
+                      <a:tailEnd type="none" w="med" len="med"/>
+                    </a:lnT>
+                    <a:lnB w="12700" cap="flat" cmpd="sng" algn="ctr">
+                      <a:solidFill>
+                        <a:schemeClr val="tx1"/>
+                      </a:solidFill>
+                      <a:prstDash val="solid"/>
+                      <a:round/>
+                      <a:headEnd type="none" w="med" len="med"/>
+                      <a:tailEnd type="none" w="med" len="med"/>
+                    </a:lnB>
+                    <a:solidFill>
+                      <a:srgbClr val="0E2841"/>
+                    </a:solidFill>
+                  </a:tcPr>
+                </a:tc>
+                <a:tc>
+                  <a:txBody>
+                    <a:bodyPr/>
+                    <a:lstStyle/>
+                    <a:p>
+                      <a:pPr marL="0" indent="0" algn="l">
+                        <a:buNone/>
+                      </a:pPr>
+                      <a:r>
+                        <a:rPr lang="en-US" sz="1800" b="1" dirty="0">
+                          <a:solidFill>
+                            <a:srgbClr val="FFFFFF"/>
+                          </a:solidFill>
+                          <a:latin typeface="+mn-lt"/>
+                          <a:ea typeface="Calibri" pitchFamily="34" charset="-122"/>
+                          <a:cs typeface="Calibri" pitchFamily="34" charset="-120"/>
+                        </a:rPr>
+                        <a:t>Definição</a:t>
+                      </a:r>
+                      <a:endParaRPr lang="en-US" sz="1800" dirty="0">
+                        <a:latin typeface="+mn-lt"/>
+                        <a:ea typeface="Calibri" charset="0"/>
+                        <a:cs typeface="Calibri" charset="0"/>
+                      </a:endParaRPr>
+                    </a:p>
+                  </a:txBody>
+                  <a:tcPr marL="76200" marR="76200" marT="50800" marB="50800" anchor="ctr">
+                    <a:lnL w="12700" cap="flat" cmpd="sng" algn="ctr">
+                      <a:solidFill>
+                        <a:schemeClr val="tx1"/>
+                      </a:solidFill>
+                      <a:prstDash val="solid"/>
+                      <a:round/>
+                      <a:headEnd type="none" w="med" len="med"/>
+                      <a:tailEnd type="none" w="med" len="med"/>
+                    </a:lnL>
+                    <a:lnR w="12700" cap="flat" cmpd="sng" algn="ctr">
+                      <a:solidFill>
+                        <a:schemeClr val="tx1"/>
+                      </a:solidFill>
+                      <a:prstDash val="solid"/>
+                      <a:round/>
+                      <a:headEnd type="none" w="med" len="med"/>
+                      <a:tailEnd type="none" w="med" len="med"/>
+                    </a:lnR>
+                    <a:lnT w="12700" cap="flat" cmpd="sng" algn="ctr">
+                      <a:solidFill>
+                        <a:schemeClr val="tx1"/>
+                      </a:solidFill>
+                      <a:prstDash val="solid"/>
+                      <a:round/>
+                      <a:headEnd type="none" w="med" len="med"/>
+                      <a:tailEnd type="none" w="med" len="med"/>
+                    </a:lnT>
+                    <a:lnB w="12700" cap="flat" cmpd="sng" algn="ctr">
+                      <a:solidFill>
+                        <a:schemeClr val="tx1"/>
+                      </a:solidFill>
+                      <a:prstDash val="solid"/>
+                      <a:round/>
+                      <a:headEnd type="none" w="med" len="med"/>
+                      <a:tailEnd type="none" w="med" len="med"/>
+                    </a:lnB>
+                    <a:solidFill>
+                      <a:srgbClr val="0E2841"/>
+                    </a:solidFill>
+                  </a:tcPr>
+                </a:tc>
+                <a:extLst>
+                  <a:ext uri="{0D108BD9-81ED-4DB2-BD59-A6C34878D82A}">
+                    <a16:rowId xmlns:a16="http://schemas.microsoft.com/office/drawing/2014/main" val="2638440986"/>
+                  </a:ext>
+                </a:extLst>
+              </a:tr>
+              <a:tr h="543003">
+                <a:tc>
+                  <a:txBody>
+                    <a:bodyPr/>
+                    <a:lstStyle/>
+                    <a:p>
+                      <a:pPr marL="0" indent="0">
+                        <a:buNone/>
+                      </a:pPr>
+                      <a:r>
+                        <a:rPr lang="en-US" sz="1400" b="1" dirty="0">
+                          <a:solidFill>
+                            <a:srgbClr val="0E2841"/>
+                          </a:solidFill>
+                          <a:latin typeface="+mn-lt"/>
+                          <a:ea typeface="Calibri" pitchFamily="34" charset="-122"/>
+                          <a:cs typeface="Calibri" pitchFamily="34" charset="-120"/>
+                        </a:rPr>
+                        <a:t>Tipo Ontológico</a:t>
+                      </a:r>
+                      <a:endParaRPr lang="en-US" sz="1400" dirty="0">
+                        <a:latin typeface="+mn-lt"/>
+                        <a:ea typeface="Calibri" charset="0"/>
+                        <a:cs typeface="Calibri" charset="0"/>
+                      </a:endParaRPr>
+                    </a:p>
+                  </a:txBody>
+                  <a:tcPr marL="76200" marR="76200" marT="50800" marB="50800" anchor="ctr">
+                    <a:lnL w="12700" cap="flat" cmpd="sng" algn="ctr">
+                      <a:solidFill>
+                        <a:schemeClr val="tx1"/>
+                      </a:solidFill>
+                      <a:prstDash val="solid"/>
+                      <a:round/>
+                      <a:headEnd type="none" w="med" len="med"/>
+                      <a:tailEnd type="none" w="med" len="med"/>
+                    </a:lnL>
+                    <a:lnR w="12700" cap="flat" cmpd="sng" algn="ctr">
+                      <a:solidFill>
+                        <a:schemeClr val="tx1"/>
+                      </a:solidFill>
+                      <a:prstDash val="solid"/>
+                      <a:round/>
+                      <a:headEnd type="none" w="med" len="med"/>
+                      <a:tailEnd type="none" w="med" len="med"/>
+                    </a:lnR>
+                    <a:lnT w="12700" cap="flat" cmpd="sng" algn="ctr">
+                      <a:solidFill>
+                        <a:schemeClr val="tx1"/>
+                      </a:solidFill>
+                      <a:prstDash val="solid"/>
+                      <a:round/>
+                      <a:headEnd type="none" w="med" len="med"/>
+                      <a:tailEnd type="none" w="med" len="med"/>
+                    </a:lnT>
+                    <a:lnB w="12700" cap="flat" cmpd="sng" algn="ctr">
+                      <a:solidFill>
+                        <a:schemeClr val="tx1"/>
+                      </a:solidFill>
+                      <a:prstDash val="solid"/>
+                      <a:round/>
+                      <a:headEnd type="none" w="med" len="med"/>
+                      <a:tailEnd type="none" w="med" len="med"/>
+                    </a:lnB>
+                    <a:solidFill>
+                      <a:srgbClr val="E8E8E8"/>
+                    </a:solidFill>
+                  </a:tcPr>
+                </a:tc>
+                <a:tc>
+                  <a:txBody>
+                    <a:bodyPr/>
+                    <a:lstStyle/>
+                    <a:p>
+                      <a:pPr marL="0" indent="0">
+                        <a:buNone/>
+                      </a:pPr>
+                      <a:r>
+                        <a:rPr lang="en-US" sz="1400" dirty="0">
+                          <a:solidFill>
+                            <a:srgbClr val="4A5568"/>
+                          </a:solidFill>
+                          <a:latin typeface="+mn-lt"/>
+                          <a:ea typeface="Calibri" pitchFamily="34" charset="-122"/>
+                          <a:cs typeface="Calibri" pitchFamily="34" charset="-120"/>
+                        </a:rPr>
+                        <a:t>Físico — causalidade energética (propagação do fogo/fumaça) e mecânica (movimentação dos agentes)</a:t>
+                      </a:r>
+                      <a:endParaRPr lang="en-US" sz="1400" dirty="0">
+                        <a:latin typeface="+mn-lt"/>
+                        <a:ea typeface="Calibri" charset="0"/>
+                        <a:cs typeface="Calibri" charset="0"/>
+                      </a:endParaRPr>
+                    </a:p>
+                  </a:txBody>
+                  <a:tcPr marL="76200" marR="76200" marT="50800" marB="50800" anchor="ctr">
+                    <a:lnL w="12700" cap="flat" cmpd="sng" algn="ctr">
+                      <a:solidFill>
+                        <a:schemeClr val="tx1"/>
+                      </a:solidFill>
+                      <a:prstDash val="solid"/>
+                      <a:round/>
+                      <a:headEnd type="none" w="med" len="med"/>
+                      <a:tailEnd type="none" w="med" len="med"/>
+                    </a:lnL>
+                    <a:lnR w="12700" cap="flat" cmpd="sng" algn="ctr">
+                      <a:solidFill>
+                        <a:schemeClr val="tx1"/>
+                      </a:solidFill>
+                      <a:prstDash val="solid"/>
+                      <a:round/>
+                      <a:headEnd type="none" w="med" len="med"/>
+                      <a:tailEnd type="none" w="med" len="med"/>
+                    </a:lnR>
+                    <a:lnT w="12700" cap="flat" cmpd="sng" algn="ctr">
+                      <a:solidFill>
+                        <a:schemeClr val="tx1"/>
+                      </a:solidFill>
+                      <a:prstDash val="solid"/>
+                      <a:round/>
+                      <a:headEnd type="none" w="med" len="med"/>
+                      <a:tailEnd type="none" w="med" len="med"/>
+                    </a:lnT>
+                    <a:lnB w="12700" cap="flat" cmpd="sng" algn="ctr">
+                      <a:solidFill>
+                        <a:schemeClr val="tx1"/>
+                      </a:solidFill>
+                      <a:prstDash val="solid"/>
+                      <a:round/>
+                      <a:headEnd type="none" w="med" len="med"/>
+                      <a:tailEnd type="none" w="med" len="med"/>
+                    </a:lnB>
+                    <a:solidFill>
+                      <a:srgbClr val="E8E8E8"/>
+                    </a:solidFill>
+                  </a:tcPr>
+                </a:tc>
+                <a:extLst>
+                  <a:ext uri="{0D108BD9-81ED-4DB2-BD59-A6C34878D82A}">
+                    <a16:rowId xmlns:a16="http://schemas.microsoft.com/office/drawing/2014/main" val="2723023356"/>
+                  </a:ext>
+                </a:extLst>
+              </a:tr>
+              <a:tr h="596467">
+                <a:tc>
+                  <a:txBody>
+                    <a:bodyPr/>
+                    <a:lstStyle/>
+                    <a:p>
+                      <a:pPr marL="0" indent="0">
+                        <a:buNone/>
+                      </a:pPr>
+                      <a:r>
+                        <a:rPr lang="en-US" sz="1400" b="1" dirty="0">
+                          <a:solidFill>
+                            <a:srgbClr val="0E2841"/>
+                          </a:solidFill>
+                          <a:latin typeface="+mn-lt"/>
+                          <a:ea typeface="Calibri" pitchFamily="34" charset="-122"/>
+                          <a:cs typeface="Calibri" pitchFamily="34" charset="-120"/>
+                        </a:rPr>
+                        <a:t>Fronteira Espacial</a:t>
+                      </a:r>
+                      <a:endParaRPr lang="en-US" sz="1400" dirty="0">
+                        <a:latin typeface="+mn-lt"/>
+                        <a:ea typeface="Calibri" charset="0"/>
+                        <a:cs typeface="Calibri" charset="0"/>
+                      </a:endParaRPr>
+                    </a:p>
+                  </a:txBody>
+                  <a:tcPr marL="76200" marR="76200" marT="50800" marB="50800" anchor="ctr">
+                    <a:lnL w="12700" cap="flat" cmpd="sng" algn="ctr">
+                      <a:solidFill>
+                        <a:schemeClr val="tx1"/>
+                      </a:solidFill>
+                      <a:prstDash val="solid"/>
+                      <a:round/>
+                      <a:headEnd type="none" w="med" len="med"/>
+                      <a:tailEnd type="none" w="med" len="med"/>
+                    </a:lnL>
+                    <a:lnR w="12700" cap="flat" cmpd="sng" algn="ctr">
+                      <a:solidFill>
+                        <a:schemeClr val="tx1"/>
+                      </a:solidFill>
+                      <a:prstDash val="solid"/>
+                      <a:round/>
+                      <a:headEnd type="none" w="med" len="med"/>
+                      <a:tailEnd type="none" w="med" len="med"/>
+                    </a:lnR>
+                    <a:lnT w="12700" cap="flat" cmpd="sng" algn="ctr">
+                      <a:solidFill>
+                        <a:schemeClr val="tx1"/>
+                      </a:solidFill>
+                      <a:prstDash val="solid"/>
+                      <a:round/>
+                      <a:headEnd type="none" w="med" len="med"/>
+                      <a:tailEnd type="none" w="med" len="med"/>
+                    </a:lnT>
+                    <a:lnB w="12700" cap="flat" cmpd="sng" algn="ctr">
+                      <a:solidFill>
+                        <a:schemeClr val="tx1"/>
+                      </a:solidFill>
+                      <a:prstDash val="solid"/>
+                      <a:round/>
+                      <a:headEnd type="none" w="med" len="med"/>
+                      <a:tailEnd type="none" w="med" len="med"/>
+                    </a:lnB>
+                    <a:solidFill>
+                      <a:srgbClr val="EDF2F7"/>
+                    </a:solidFill>
+                  </a:tcPr>
+                </a:tc>
+                <a:tc>
+                  <a:txBody>
+                    <a:bodyPr/>
+                    <a:lstStyle/>
+                    <a:p>
+                      <a:pPr marL="0" indent="0">
+                        <a:buNone/>
+                      </a:pPr>
+                      <a:r>
+                        <a:rPr lang="en-US" sz="1400" dirty="0">
+                          <a:solidFill>
+                            <a:srgbClr val="4A5568"/>
+                          </a:solidFill>
+                          <a:latin typeface="+mn-lt"/>
+                          <a:ea typeface="Calibri" pitchFamily="34" charset="-122"/>
+                          <a:cs typeface="Calibri" pitchFamily="34" charset="-120"/>
+                        </a:rPr>
+                        <a:t>Edifício de 30 andares (0 a 29); cada andar representado como grade 2D de 20×20 células com corredores, salas, escadas e saídas</a:t>
+                      </a:r>
+                      <a:endParaRPr lang="en-US" sz="1400" dirty="0">
+                        <a:latin typeface="+mn-lt"/>
+                        <a:ea typeface="Calibri" charset="0"/>
+                        <a:cs typeface="Calibri" charset="0"/>
+                      </a:endParaRPr>
+                    </a:p>
+                  </a:txBody>
+                  <a:tcPr marL="76200" marR="76200" marT="50800" marB="50800" anchor="ctr">
+                    <a:lnL w="12700" cap="flat" cmpd="sng" algn="ctr">
+                      <a:solidFill>
+                        <a:schemeClr val="tx1"/>
+                      </a:solidFill>
+                      <a:prstDash val="solid"/>
+                      <a:round/>
+                      <a:headEnd type="none" w="med" len="med"/>
+                      <a:tailEnd type="none" w="med" len="med"/>
+                    </a:lnL>
+                    <a:lnR w="12700" cap="flat" cmpd="sng" algn="ctr">
+                      <a:solidFill>
+                        <a:schemeClr val="tx1"/>
+                      </a:solidFill>
+                      <a:prstDash val="solid"/>
+                      <a:round/>
+                      <a:headEnd type="none" w="med" len="med"/>
+                      <a:tailEnd type="none" w="med" len="med"/>
+                    </a:lnR>
+                    <a:lnT w="12700" cap="flat" cmpd="sng" algn="ctr">
+                      <a:solidFill>
+                        <a:schemeClr val="tx1"/>
+                      </a:solidFill>
+                      <a:prstDash val="solid"/>
+                      <a:round/>
+                      <a:headEnd type="none" w="med" len="med"/>
+                      <a:tailEnd type="none" w="med" len="med"/>
+                    </a:lnT>
+                    <a:lnB w="12700" cap="flat" cmpd="sng" algn="ctr">
+                      <a:solidFill>
+                        <a:schemeClr val="tx1"/>
+                      </a:solidFill>
+                      <a:prstDash val="solid"/>
+                      <a:round/>
+                      <a:headEnd type="none" w="med" len="med"/>
+                      <a:tailEnd type="none" w="med" len="med"/>
+                    </a:lnB>
+                    <a:solidFill>
+                      <a:srgbClr val="EDF2F7"/>
+                    </a:solidFill>
+                  </a:tcPr>
+                </a:tc>
+                <a:extLst>
+                  <a:ext uri="{0D108BD9-81ED-4DB2-BD59-A6C34878D82A}">
+                    <a16:rowId xmlns:a16="http://schemas.microsoft.com/office/drawing/2014/main" val="948564216"/>
+                  </a:ext>
+                </a:extLst>
+              </a:tr>
+              <a:tr h="543003">
+                <a:tc>
+                  <a:txBody>
+                    <a:bodyPr/>
+                    <a:lstStyle/>
+                    <a:p>
+                      <a:pPr marL="0" indent="0">
+                        <a:buNone/>
+                      </a:pPr>
+                      <a:r>
+                        <a:rPr lang="en-US" sz="1400" b="1" dirty="0">
+                          <a:solidFill>
+                            <a:srgbClr val="0E2841"/>
+                          </a:solidFill>
+                          <a:latin typeface="+mn-lt"/>
+                          <a:ea typeface="Calibri" pitchFamily="34" charset="-122"/>
+                          <a:cs typeface="Calibri" pitchFamily="34" charset="-120"/>
+                        </a:rPr>
+                        <a:t>Fronteira Temporal</a:t>
+                      </a:r>
+                      <a:endParaRPr lang="en-US" sz="1400" dirty="0">
+                        <a:latin typeface="+mn-lt"/>
+                        <a:ea typeface="Calibri" charset="0"/>
+                        <a:cs typeface="Calibri" charset="0"/>
+                      </a:endParaRPr>
+                    </a:p>
+                  </a:txBody>
+                  <a:tcPr marL="76200" marR="76200" marT="50800" marB="50800" anchor="ctr">
+                    <a:lnL w="12700" cap="flat" cmpd="sng" algn="ctr">
+                      <a:solidFill>
+                        <a:schemeClr val="tx1"/>
+                      </a:solidFill>
+                      <a:prstDash val="solid"/>
+                      <a:round/>
+                      <a:headEnd type="none" w="med" len="med"/>
+                      <a:tailEnd type="none" w="med" len="med"/>
+                    </a:lnL>
+                    <a:lnR w="12700" cap="flat" cmpd="sng" algn="ctr">
+                      <a:solidFill>
+                        <a:schemeClr val="tx1"/>
+                      </a:solidFill>
+                      <a:prstDash val="solid"/>
+                      <a:round/>
+                      <a:headEnd type="none" w="med" len="med"/>
+                      <a:tailEnd type="none" w="med" len="med"/>
+                    </a:lnR>
+                    <a:lnT w="12700" cap="flat" cmpd="sng" algn="ctr">
+                      <a:solidFill>
+                        <a:schemeClr val="tx1"/>
+                      </a:solidFill>
+                      <a:prstDash val="solid"/>
+                      <a:round/>
+                      <a:headEnd type="none" w="med" len="med"/>
+                      <a:tailEnd type="none" w="med" len="med"/>
+                    </a:lnT>
+                    <a:lnB w="12700" cap="flat" cmpd="sng" algn="ctr">
+                      <a:solidFill>
+                        <a:schemeClr val="tx1"/>
+                      </a:solidFill>
+                      <a:prstDash val="solid"/>
+                      <a:round/>
+                      <a:headEnd type="none" w="med" len="med"/>
+                      <a:tailEnd type="none" w="med" len="med"/>
+                    </a:lnB>
+                    <a:solidFill>
+                      <a:srgbClr val="E8E8E8"/>
+                    </a:solidFill>
+                  </a:tcPr>
+                </a:tc>
+                <a:tc>
+                  <a:txBody>
+                    <a:bodyPr/>
+                    <a:lstStyle/>
+                    <a:p>
+                      <a:pPr marL="0" indent="0">
+                        <a:buNone/>
+                      </a:pPr>
+                      <a:r>
+                        <a:rPr lang="en-US" sz="1400" dirty="0">
+                          <a:solidFill>
+                            <a:srgbClr val="4A5568"/>
+                          </a:solidFill>
+                          <a:latin typeface="+mn-lt"/>
+                          <a:ea typeface="Calibri" pitchFamily="34" charset="-122"/>
+                          <a:cs typeface="Calibri" pitchFamily="34" charset="-120"/>
+                        </a:rPr>
+                        <a:t>Início do incêndio até evacuação total ou término da simulação; granularidade discreta </a:t>
+                      </a:r>
+                      <a:r>
+                        <a:rPr lang="en-US" sz="1400" dirty="0" err="1">
+                          <a:solidFill>
+                            <a:srgbClr val="4A5568"/>
+                          </a:solidFill>
+                          <a:latin typeface="+mn-lt"/>
+                          <a:ea typeface="Calibri" pitchFamily="34" charset="-122"/>
+                          <a:cs typeface="Calibri" pitchFamily="34" charset="-120"/>
+                        </a:rPr>
+                        <a:t>por</a:t>
+                      </a:r>
+                      <a:r>
+                        <a:rPr lang="en-US" sz="1400" dirty="0">
+                          <a:solidFill>
+                            <a:srgbClr val="4A5568"/>
+                          </a:solidFill>
+                          <a:latin typeface="+mn-lt"/>
+                          <a:ea typeface="Calibri" pitchFamily="34" charset="-122"/>
+                          <a:cs typeface="Calibri" pitchFamily="34" charset="-120"/>
+                        </a:rPr>
+                        <a:t> tick</a:t>
+                      </a:r>
+                      <a:endParaRPr lang="en-US" sz="1400" dirty="0">
+                        <a:latin typeface="+mn-lt"/>
+                        <a:ea typeface="Calibri" charset="0"/>
+                        <a:cs typeface="Calibri" charset="0"/>
+                      </a:endParaRPr>
+                    </a:p>
+                  </a:txBody>
+                  <a:tcPr marL="76200" marR="76200" marT="50800" marB="50800" anchor="ctr">
+                    <a:lnL w="12700" cap="flat" cmpd="sng" algn="ctr">
+                      <a:solidFill>
+                        <a:schemeClr val="tx1"/>
+                      </a:solidFill>
+                      <a:prstDash val="solid"/>
+                      <a:round/>
+                      <a:headEnd type="none" w="med" len="med"/>
+                      <a:tailEnd type="none" w="med" len="med"/>
+                    </a:lnL>
+                    <a:lnR w="12700" cap="flat" cmpd="sng" algn="ctr">
+                      <a:solidFill>
+                        <a:schemeClr val="tx1"/>
+                      </a:solidFill>
+                      <a:prstDash val="solid"/>
+                      <a:round/>
+                      <a:headEnd type="none" w="med" len="med"/>
+                      <a:tailEnd type="none" w="med" len="med"/>
+                    </a:lnR>
+                    <a:lnT w="12700" cap="flat" cmpd="sng" algn="ctr">
+                      <a:solidFill>
+                        <a:schemeClr val="tx1"/>
+                      </a:solidFill>
+                      <a:prstDash val="solid"/>
+                      <a:round/>
+                      <a:headEnd type="none" w="med" len="med"/>
+                      <a:tailEnd type="none" w="med" len="med"/>
+                    </a:lnT>
+                    <a:lnB w="12700" cap="flat" cmpd="sng" algn="ctr">
+                      <a:solidFill>
+                        <a:schemeClr val="tx1"/>
+                      </a:solidFill>
+                      <a:prstDash val="solid"/>
+                      <a:round/>
+                      <a:headEnd type="none" w="med" len="med"/>
+                      <a:tailEnd type="none" w="med" len="med"/>
+                    </a:lnB>
+                    <a:solidFill>
+                      <a:srgbClr val="E8E8E8"/>
+                    </a:solidFill>
+                  </a:tcPr>
+                </a:tc>
+                <a:extLst>
+                  <a:ext uri="{0D108BD9-81ED-4DB2-BD59-A6C34878D82A}">
+                    <a16:rowId xmlns:a16="http://schemas.microsoft.com/office/drawing/2014/main" val="2585036500"/>
+                  </a:ext>
+                </a:extLst>
+              </a:tr>
+              <a:tr h="543003">
+                <a:tc>
+                  <a:txBody>
+                    <a:bodyPr/>
+                    <a:lstStyle/>
+                    <a:p>
+                      <a:pPr marL="0" indent="0">
+                        <a:buNone/>
+                      </a:pPr>
+                      <a:r>
+                        <a:rPr lang="en-US" sz="1400" b="1" dirty="0">
+                          <a:solidFill>
+                            <a:srgbClr val="0E2841"/>
+                          </a:solidFill>
+                          <a:latin typeface="+mn-lt"/>
+                          <a:ea typeface="Calibri" pitchFamily="34" charset="-122"/>
+                          <a:cs typeface="Calibri" pitchFamily="34" charset="-120"/>
+                        </a:rPr>
+                        <a:t>Fronteira Funcional</a:t>
+                      </a:r>
+                      <a:endParaRPr lang="en-US" sz="1400" dirty="0">
+                        <a:latin typeface="+mn-lt"/>
+                        <a:ea typeface="Calibri" charset="0"/>
+                        <a:cs typeface="Calibri" charset="0"/>
+                      </a:endParaRPr>
+                    </a:p>
+                  </a:txBody>
+                  <a:tcPr marL="76200" marR="76200" marT="50800" marB="50800" anchor="ctr">
+                    <a:lnL w="12700" cap="flat" cmpd="sng" algn="ctr">
+                      <a:solidFill>
+                        <a:schemeClr val="tx1"/>
+                      </a:solidFill>
+                      <a:prstDash val="solid"/>
+                      <a:round/>
+                      <a:headEnd type="none" w="med" len="med"/>
+                      <a:tailEnd type="none" w="med" len="med"/>
+                    </a:lnL>
+                    <a:lnR w="12700" cap="flat" cmpd="sng" algn="ctr">
+                      <a:solidFill>
+                        <a:schemeClr val="tx1"/>
+                      </a:solidFill>
+                      <a:prstDash val="solid"/>
+                      <a:round/>
+                      <a:headEnd type="none" w="med" len="med"/>
+                      <a:tailEnd type="none" w="med" len="med"/>
+                    </a:lnR>
+                    <a:lnT w="12700" cap="flat" cmpd="sng" algn="ctr">
+                      <a:solidFill>
+                        <a:schemeClr val="tx1"/>
+                      </a:solidFill>
+                      <a:prstDash val="solid"/>
+                      <a:round/>
+                      <a:headEnd type="none" w="med" len="med"/>
+                      <a:tailEnd type="none" w="med" len="med"/>
+                    </a:lnT>
+                    <a:lnB w="12700" cap="flat" cmpd="sng" algn="ctr">
+                      <a:solidFill>
+                        <a:schemeClr val="tx1"/>
+                      </a:solidFill>
+                      <a:prstDash val="solid"/>
+                      <a:round/>
+                      <a:headEnd type="none" w="med" len="med"/>
+                      <a:tailEnd type="none" w="med" len="med"/>
+                    </a:lnB>
+                    <a:solidFill>
+                      <a:srgbClr val="EDF2F7"/>
+                    </a:solidFill>
+                  </a:tcPr>
+                </a:tc>
+                <a:tc>
+                  <a:txBody>
+                    <a:bodyPr/>
+                    <a:lstStyle/>
+                    <a:p>
+                      <a:pPr marL="0" indent="0">
+                        <a:buNone/>
+                      </a:pPr>
+                      <a:r>
+                        <a:rPr lang="en-US" sz="1400" dirty="0">
+                          <a:solidFill>
+                            <a:srgbClr val="4A5568"/>
+                          </a:solidFill>
+                          <a:latin typeface="+mn-lt"/>
+                          <a:ea typeface="Calibri" pitchFamily="34" charset="-122"/>
+                          <a:cs typeface="Calibri" pitchFamily="34" charset="-120"/>
+                        </a:rPr>
+                        <a:t>Propagação de fogo, dispersão de fumaça, movimentação de ocupantes e ação de brigadistas dentro do edifício</a:t>
+                      </a:r>
+                      <a:endParaRPr lang="en-US" sz="1400" dirty="0">
+                        <a:latin typeface="+mn-lt"/>
+                        <a:ea typeface="Calibri" charset="0"/>
+                        <a:cs typeface="Calibri" charset="0"/>
+                      </a:endParaRPr>
+                    </a:p>
+                  </a:txBody>
+                  <a:tcPr marL="76200" marR="76200" marT="50800" marB="50800" anchor="ctr">
+                    <a:lnL w="12700" cap="flat" cmpd="sng" algn="ctr">
+                      <a:solidFill>
+                        <a:schemeClr val="tx1"/>
+                      </a:solidFill>
+                      <a:prstDash val="solid"/>
+                      <a:round/>
+                      <a:headEnd type="none" w="med" len="med"/>
+                      <a:tailEnd type="none" w="med" len="med"/>
+                    </a:lnL>
+                    <a:lnR w="12700" cap="flat" cmpd="sng" algn="ctr">
+                      <a:solidFill>
+                        <a:schemeClr val="tx1"/>
+                      </a:solidFill>
+                      <a:prstDash val="solid"/>
+                      <a:round/>
+                      <a:headEnd type="none" w="med" len="med"/>
+                      <a:tailEnd type="none" w="med" len="med"/>
+                    </a:lnR>
+                    <a:lnT w="12700" cap="flat" cmpd="sng" algn="ctr">
+                      <a:solidFill>
+                        <a:schemeClr val="tx1"/>
+                      </a:solidFill>
+                      <a:prstDash val="solid"/>
+                      <a:round/>
+                      <a:headEnd type="none" w="med" len="med"/>
+                      <a:tailEnd type="none" w="med" len="med"/>
+                    </a:lnT>
+                    <a:lnB w="12700" cap="flat" cmpd="sng" algn="ctr">
+                      <a:solidFill>
+                        <a:schemeClr val="tx1"/>
+                      </a:solidFill>
+                      <a:prstDash val="solid"/>
+                      <a:round/>
+                      <a:headEnd type="none" w="med" len="med"/>
+                      <a:tailEnd type="none" w="med" len="med"/>
+                    </a:lnB>
+                    <a:solidFill>
+                      <a:srgbClr val="EDF2F7"/>
+                    </a:solidFill>
+                  </a:tcPr>
+                </a:tc>
+                <a:extLst>
+                  <a:ext uri="{0D108BD9-81ED-4DB2-BD59-A6C34878D82A}">
+                    <a16:rowId xmlns:a16="http://schemas.microsoft.com/office/drawing/2014/main" val="3901536174"/>
+                  </a:ext>
+                </a:extLst>
+              </a:tr>
+              <a:tr h="543003">
+                <a:tc>
+                  <a:txBody>
+                    <a:bodyPr/>
+                    <a:lstStyle/>
+                    <a:p>
+                      <a:pPr marL="0" indent="0">
+                        <a:buNone/>
+                      </a:pPr>
+                      <a:r>
+                        <a:rPr lang="en-US" sz="1400" b="1" dirty="0">
+                          <a:solidFill>
+                            <a:srgbClr val="0E2841"/>
+                          </a:solidFill>
+                          <a:latin typeface="+mn-lt"/>
+                          <a:ea typeface="Calibri" pitchFamily="34" charset="-122"/>
+                          <a:cs typeface="Calibri" pitchFamily="34" charset="-120"/>
+                        </a:rPr>
+                        <a:t>Escala</a:t>
+                      </a:r>
+                      <a:endParaRPr lang="en-US" sz="1400" dirty="0">
+                        <a:latin typeface="+mn-lt"/>
+                        <a:ea typeface="Calibri" charset="0"/>
+                        <a:cs typeface="Calibri" charset="0"/>
+                      </a:endParaRPr>
+                    </a:p>
+                  </a:txBody>
+                  <a:tcPr marL="76200" marR="76200" marT="50800" marB="50800" anchor="ctr">
+                    <a:lnL w="12700" cap="flat" cmpd="sng" algn="ctr">
+                      <a:solidFill>
+                        <a:schemeClr val="tx1"/>
+                      </a:solidFill>
+                      <a:prstDash val="solid"/>
+                      <a:round/>
+                      <a:headEnd type="none" w="med" len="med"/>
+                      <a:tailEnd type="none" w="med" len="med"/>
+                    </a:lnL>
+                    <a:lnR w="12700" cap="flat" cmpd="sng" algn="ctr">
+                      <a:solidFill>
+                        <a:schemeClr val="tx1"/>
+                      </a:solidFill>
+                      <a:prstDash val="solid"/>
+                      <a:round/>
+                      <a:headEnd type="none" w="med" len="med"/>
+                      <a:tailEnd type="none" w="med" len="med"/>
+                    </a:lnR>
+                    <a:lnT w="12700" cap="flat" cmpd="sng" algn="ctr">
+                      <a:solidFill>
+                        <a:schemeClr val="tx1"/>
+                      </a:solidFill>
+                      <a:prstDash val="solid"/>
+                      <a:round/>
+                      <a:headEnd type="none" w="med" len="med"/>
+                      <a:tailEnd type="none" w="med" len="med"/>
+                    </a:lnT>
+                    <a:lnB w="12700" cap="flat" cmpd="sng" algn="ctr">
+                      <a:solidFill>
+                        <a:schemeClr val="tx1"/>
+                      </a:solidFill>
+                      <a:prstDash val="solid"/>
+                      <a:round/>
+                      <a:headEnd type="none" w="med" len="med"/>
+                      <a:tailEnd type="none" w="med" len="med"/>
+                    </a:lnB>
+                    <a:solidFill>
+                      <a:srgbClr val="E8E8E8"/>
+                    </a:solidFill>
+                  </a:tcPr>
+                </a:tc>
+                <a:tc>
+                  <a:txBody>
+                    <a:bodyPr/>
+                    <a:lstStyle/>
+                    <a:p>
+                      <a:pPr marL="0" indent="0">
+                        <a:buNone/>
+                      </a:pPr>
+                      <a:r>
+                        <a:rPr lang="en-US" sz="1400" dirty="0">
+                          <a:solidFill>
+                            <a:srgbClr val="4A5568"/>
+                          </a:solidFill>
+                          <a:latin typeface="+mn-lt"/>
+                          <a:ea typeface="Calibri" pitchFamily="34" charset="-122"/>
+                          <a:cs typeface="Calibri" pitchFamily="34" charset="-120"/>
+                        </a:rPr>
+                        <a:t>Espacial: meso (edifício, resolução por </a:t>
+                      </a:r>
+                      <a:r>
+                        <a:rPr lang="en-US" sz="1400" dirty="0" err="1">
+                          <a:solidFill>
+                            <a:srgbClr val="4A5568"/>
+                          </a:solidFill>
+                          <a:latin typeface="+mn-lt"/>
+                          <a:ea typeface="Calibri" pitchFamily="34" charset="-122"/>
+                          <a:cs typeface="Calibri" pitchFamily="34" charset="-120"/>
+                        </a:rPr>
+                        <a:t>célula</a:t>
+                      </a:r>
+                      <a:r>
+                        <a:rPr lang="en-US" sz="1400" dirty="0">
+                          <a:solidFill>
+                            <a:srgbClr val="4A5568"/>
+                          </a:solidFill>
+                          <a:latin typeface="+mn-lt"/>
+                          <a:ea typeface="Calibri" pitchFamily="34" charset="-122"/>
+                          <a:cs typeface="Calibri" pitchFamily="34" charset="-120"/>
+                        </a:rPr>
+                        <a:t>); Temporal: evento (</a:t>
+                      </a:r>
+                      <a:r>
+                        <a:rPr lang="en-US" sz="1400" dirty="0" err="1">
+                          <a:solidFill>
+                            <a:srgbClr val="4A5568"/>
+                          </a:solidFill>
+                          <a:latin typeface="+mn-lt"/>
+                          <a:ea typeface="Calibri" pitchFamily="34" charset="-122"/>
+                          <a:cs typeface="Calibri" pitchFamily="34" charset="-120"/>
+                        </a:rPr>
+                        <a:t>minutos</a:t>
+                      </a:r>
+                      <a:r>
+                        <a:rPr lang="en-US" sz="1400" dirty="0">
+                          <a:solidFill>
+                            <a:srgbClr val="4A5568"/>
+                          </a:solidFill>
+                          <a:latin typeface="+mn-lt"/>
+                          <a:ea typeface="Calibri" pitchFamily="34" charset="-122"/>
+                          <a:cs typeface="Calibri" pitchFamily="34" charset="-120"/>
+                        </a:rPr>
+                        <a:t>); Ontológica: elementar (agentes individuais)</a:t>
+                      </a:r>
+                      <a:endParaRPr lang="en-US" sz="1400" dirty="0">
+                        <a:latin typeface="+mn-lt"/>
+                        <a:ea typeface="Calibri" charset="0"/>
+                        <a:cs typeface="Calibri" charset="0"/>
+                      </a:endParaRPr>
+                    </a:p>
+                  </a:txBody>
+                  <a:tcPr marL="76200" marR="76200" marT="50800" marB="50800" anchor="ctr">
+                    <a:lnL w="12700" cap="flat" cmpd="sng" algn="ctr">
+                      <a:solidFill>
+                        <a:schemeClr val="tx1"/>
+                      </a:solidFill>
+                      <a:prstDash val="solid"/>
+                      <a:round/>
+                      <a:headEnd type="none" w="med" len="med"/>
+                      <a:tailEnd type="none" w="med" len="med"/>
+                    </a:lnL>
+                    <a:lnR w="12700" cap="flat" cmpd="sng" algn="ctr">
+                      <a:solidFill>
+                        <a:schemeClr val="tx1"/>
+                      </a:solidFill>
+                      <a:prstDash val="solid"/>
+                      <a:round/>
+                      <a:headEnd type="none" w="med" len="med"/>
+                      <a:tailEnd type="none" w="med" len="med"/>
+                    </a:lnR>
+                    <a:lnT w="12700" cap="flat" cmpd="sng" algn="ctr">
+                      <a:solidFill>
+                        <a:schemeClr val="tx1"/>
+                      </a:solidFill>
+                      <a:prstDash val="solid"/>
+                      <a:round/>
+                      <a:headEnd type="none" w="med" len="med"/>
+                      <a:tailEnd type="none" w="med" len="med"/>
+                    </a:lnT>
+                    <a:lnB w="12700" cap="flat" cmpd="sng" algn="ctr">
+                      <a:solidFill>
+                        <a:schemeClr val="tx1"/>
+                      </a:solidFill>
+                      <a:prstDash val="solid"/>
+                      <a:round/>
+                      <a:headEnd type="none" w="med" len="med"/>
+                      <a:tailEnd type="none" w="med" len="med"/>
+                    </a:lnB>
+                    <a:solidFill>
+                      <a:srgbClr val="E8E8E8"/>
+                    </a:solidFill>
+                  </a:tcPr>
+                </a:tc>
+                <a:extLst>
+                  <a:ext uri="{0D108BD9-81ED-4DB2-BD59-A6C34878D82A}">
+                    <a16:rowId xmlns:a16="http://schemas.microsoft.com/office/drawing/2014/main" val="3747606673"/>
+                  </a:ext>
+                </a:extLst>
+              </a:tr>
+              <a:tr h="596467">
+                <a:tc>
+                  <a:txBody>
+                    <a:bodyPr/>
+                    <a:lstStyle/>
+                    <a:p>
+                      <a:pPr marL="0" indent="0">
+                        <a:buNone/>
+                      </a:pPr>
+                      <a:r>
+                        <a:rPr lang="en-US" sz="1400" b="1" dirty="0">
+                          <a:solidFill>
+                            <a:srgbClr val="0E2841"/>
+                          </a:solidFill>
+                          <a:latin typeface="+mn-lt"/>
+                          <a:ea typeface="Calibri" pitchFamily="34" charset="-122"/>
+                          <a:cs typeface="Calibri" pitchFamily="34" charset="-120"/>
+                        </a:rPr>
+                        <a:t>Entidades</a:t>
+                      </a:r>
+                      <a:endParaRPr lang="en-US" sz="1400" dirty="0">
+                        <a:latin typeface="+mn-lt"/>
+                        <a:ea typeface="Calibri" charset="0"/>
+                        <a:cs typeface="Calibri" charset="0"/>
+                      </a:endParaRPr>
+                    </a:p>
+                  </a:txBody>
+                  <a:tcPr marL="76200" marR="76200" marT="50800" marB="50800" anchor="ctr">
+                    <a:lnL w="12700" cap="flat" cmpd="sng" algn="ctr">
+                      <a:solidFill>
+                        <a:schemeClr val="tx1"/>
+                      </a:solidFill>
+                      <a:prstDash val="solid"/>
+                      <a:round/>
+                      <a:headEnd type="none" w="med" len="med"/>
+                      <a:tailEnd type="none" w="med" len="med"/>
+                    </a:lnL>
+                    <a:lnR w="12700" cap="flat" cmpd="sng" algn="ctr">
+                      <a:solidFill>
+                        <a:schemeClr val="tx1"/>
+                      </a:solidFill>
+                      <a:prstDash val="solid"/>
+                      <a:round/>
+                      <a:headEnd type="none" w="med" len="med"/>
+                      <a:tailEnd type="none" w="med" len="med"/>
+                    </a:lnR>
+                    <a:lnT w="12700" cap="flat" cmpd="sng" algn="ctr">
+                      <a:solidFill>
+                        <a:schemeClr val="tx1"/>
+                      </a:solidFill>
+                      <a:prstDash val="solid"/>
+                      <a:round/>
+                      <a:headEnd type="none" w="med" len="med"/>
+                      <a:tailEnd type="none" w="med" len="med"/>
+                    </a:lnT>
+                    <a:lnB w="12700" cap="flat" cmpd="sng" algn="ctr">
+                      <a:solidFill>
+                        <a:schemeClr val="tx1"/>
+                      </a:solidFill>
+                      <a:prstDash val="solid"/>
+                      <a:round/>
+                      <a:headEnd type="none" w="med" len="med"/>
+                      <a:tailEnd type="none" w="med" len="med"/>
+                    </a:lnB>
+                    <a:solidFill>
+                      <a:srgbClr val="EDF2F7"/>
+                    </a:solidFill>
+                  </a:tcPr>
+                </a:tc>
+                <a:tc>
+                  <a:txBody>
+                    <a:bodyPr/>
+                    <a:lstStyle/>
+                    <a:p>
+                      <a:pPr marL="0" indent="0">
+                        <a:buNone/>
+                      </a:pPr>
+                      <a:r>
+                        <a:rPr lang="en-US" sz="1400" dirty="0">
+                          <a:solidFill>
+                            <a:srgbClr val="4A5568"/>
+                          </a:solidFill>
+                          <a:latin typeface="+mn-lt"/>
+                          <a:ea typeface="Calibri" pitchFamily="34" charset="-122"/>
+                          <a:cs typeface="Calibri" pitchFamily="34" charset="-120"/>
+                        </a:rPr>
+                        <a:t>Ocupantes (adultos vel. 1.0, idosos vel. 0.6, PcD vel. 0.4), brigadistas (vel. 1.5), fogo, fumaça, escadas (fluxo limitado), corredores, saídas de emergência</a:t>
+                      </a:r>
+                      <a:endParaRPr lang="en-US" sz="1400" dirty="0">
+                        <a:latin typeface="+mn-lt"/>
+                        <a:ea typeface="Calibri" charset="0"/>
+                        <a:cs typeface="Calibri" charset="0"/>
+                      </a:endParaRPr>
+                    </a:p>
+                  </a:txBody>
+                  <a:tcPr marL="76200" marR="76200" marT="50800" marB="50800" anchor="ctr">
+                    <a:lnL w="12700" cap="flat" cmpd="sng" algn="ctr">
+                      <a:solidFill>
+                        <a:schemeClr val="tx1"/>
+                      </a:solidFill>
+                      <a:prstDash val="solid"/>
+                      <a:round/>
+                      <a:headEnd type="none" w="med" len="med"/>
+                      <a:tailEnd type="none" w="med" len="med"/>
+                    </a:lnL>
+                    <a:lnR w="12700" cap="flat" cmpd="sng" algn="ctr">
+                      <a:solidFill>
+                        <a:schemeClr val="tx1"/>
+                      </a:solidFill>
+                      <a:prstDash val="solid"/>
+                      <a:round/>
+                      <a:headEnd type="none" w="med" len="med"/>
+                      <a:tailEnd type="none" w="med" len="med"/>
+                    </a:lnR>
+                    <a:lnT w="12700" cap="flat" cmpd="sng" algn="ctr">
+                      <a:solidFill>
+                        <a:schemeClr val="tx1"/>
+                      </a:solidFill>
+                      <a:prstDash val="solid"/>
+                      <a:round/>
+                      <a:headEnd type="none" w="med" len="med"/>
+                      <a:tailEnd type="none" w="med" len="med"/>
+                    </a:lnT>
+                    <a:lnB w="12700" cap="flat" cmpd="sng" algn="ctr">
+                      <a:solidFill>
+                        <a:schemeClr val="tx1"/>
+                      </a:solidFill>
+                      <a:prstDash val="solid"/>
+                      <a:round/>
+                      <a:headEnd type="none" w="med" len="med"/>
+                      <a:tailEnd type="none" w="med" len="med"/>
+                    </a:lnB>
+                    <a:solidFill>
+                      <a:srgbClr val="EDF2F7"/>
+                    </a:solidFill>
+                  </a:tcPr>
+                </a:tc>
+                <a:extLst>
+                  <a:ext uri="{0D108BD9-81ED-4DB2-BD59-A6C34878D82A}">
+                    <a16:rowId xmlns:a16="http://schemas.microsoft.com/office/drawing/2014/main" val="1016101071"/>
+                  </a:ext>
+                </a:extLst>
+              </a:tr>
+              <a:tr h="543003">
+                <a:tc>
+                  <a:txBody>
+                    <a:bodyPr/>
+                    <a:lstStyle/>
+                    <a:p>
+                      <a:pPr marL="0" indent="0">
+                        <a:buNone/>
+                      </a:pPr>
+                      <a:r>
+                        <a:rPr lang="en-US" sz="1400" b="1" dirty="0">
+                          <a:solidFill>
+                            <a:srgbClr val="0E2841"/>
+                          </a:solidFill>
+                          <a:latin typeface="+mn-lt"/>
+                          <a:ea typeface="Calibri" pitchFamily="34" charset="-122"/>
+                          <a:cs typeface="Calibri" pitchFamily="34" charset="-120"/>
+                        </a:rPr>
+                        <a:t>Regime de Observação</a:t>
+                      </a:r>
+                      <a:endParaRPr lang="en-US" sz="1400" dirty="0">
+                        <a:latin typeface="+mn-lt"/>
+                        <a:ea typeface="Calibri" charset="0"/>
+                        <a:cs typeface="Calibri" charset="0"/>
+                      </a:endParaRPr>
+                    </a:p>
+                  </a:txBody>
+                  <a:tcPr marL="76200" marR="76200" marT="50800" marB="50800" anchor="ctr">
+                    <a:lnL w="12700" cap="flat" cmpd="sng" algn="ctr">
+                      <a:solidFill>
+                        <a:schemeClr val="tx1"/>
+                      </a:solidFill>
+                      <a:prstDash val="solid"/>
+                      <a:round/>
+                      <a:headEnd type="none" w="med" len="med"/>
+                      <a:tailEnd type="none" w="med" len="med"/>
+                    </a:lnL>
+                    <a:lnR w="12700" cap="flat" cmpd="sng" algn="ctr">
+                      <a:solidFill>
+                        <a:schemeClr val="tx1"/>
+                      </a:solidFill>
+                      <a:prstDash val="solid"/>
+                      <a:round/>
+                      <a:headEnd type="none" w="med" len="med"/>
+                      <a:tailEnd type="none" w="med" len="med"/>
+                    </a:lnR>
+                    <a:lnT w="12700" cap="flat" cmpd="sng" algn="ctr">
+                      <a:solidFill>
+                        <a:schemeClr val="tx1"/>
+                      </a:solidFill>
+                      <a:prstDash val="solid"/>
+                      <a:round/>
+                      <a:headEnd type="none" w="med" len="med"/>
+                      <a:tailEnd type="none" w="med" len="med"/>
+                    </a:lnT>
+                    <a:lnB w="12700" cap="flat" cmpd="sng" algn="ctr">
+                      <a:solidFill>
+                        <a:schemeClr val="tx1"/>
+                      </a:solidFill>
+                      <a:prstDash val="solid"/>
+                      <a:round/>
+                      <a:headEnd type="none" w="med" len="med"/>
+                      <a:tailEnd type="none" w="med" len="med"/>
+                    </a:lnB>
+                    <a:solidFill>
+                      <a:srgbClr val="E8E8E8"/>
+                    </a:solidFill>
+                  </a:tcPr>
+                </a:tc>
+                <a:tc>
+                  <a:txBody>
+                    <a:bodyPr/>
+                    <a:lstStyle/>
+                    <a:p>
+                      <a:pPr marL="0" indent="0">
+                        <a:buNone/>
+                      </a:pPr>
+                      <a:r>
+                        <a:rPr lang="en-US" sz="1400" dirty="0">
+                          <a:solidFill>
+                            <a:srgbClr val="4A5568"/>
+                          </a:solidFill>
+                          <a:latin typeface="+mn-lt"/>
+                          <a:ea typeface="Calibri" pitchFamily="34" charset="-122"/>
+                          <a:cs typeface="Calibri" pitchFamily="34" charset="-120"/>
+                        </a:rPr>
+                        <a:t>Instrumentado e automatizado: coleta de métricas a tick</a:t>
+                      </a:r>
+                      <a:endParaRPr lang="en-US" sz="1400" dirty="0">
+                        <a:latin typeface="+mn-lt"/>
+                        <a:ea typeface="Calibri" charset="0"/>
+                        <a:cs typeface="Calibri" charset="0"/>
+                      </a:endParaRPr>
+                    </a:p>
+                  </a:txBody>
+                  <a:tcPr marL="76200" marR="76200" marT="50800" marB="50800" anchor="ctr">
+                    <a:lnL w="12700" cap="flat" cmpd="sng" algn="ctr">
+                      <a:solidFill>
+                        <a:schemeClr val="tx1"/>
+                      </a:solidFill>
+                      <a:prstDash val="solid"/>
+                      <a:round/>
+                      <a:headEnd type="none" w="med" len="med"/>
+                      <a:tailEnd type="none" w="med" len="med"/>
+                    </a:lnL>
+                    <a:lnR w="12700" cap="flat" cmpd="sng" algn="ctr">
+                      <a:solidFill>
+                        <a:schemeClr val="tx1"/>
+                      </a:solidFill>
+                      <a:prstDash val="solid"/>
+                      <a:round/>
+                      <a:headEnd type="none" w="med" len="med"/>
+                      <a:tailEnd type="none" w="med" len="med"/>
+                    </a:lnR>
+                    <a:lnT w="12700" cap="flat" cmpd="sng" algn="ctr">
+                      <a:solidFill>
+                        <a:schemeClr val="tx1"/>
+                      </a:solidFill>
+                      <a:prstDash val="solid"/>
+                      <a:round/>
+                      <a:headEnd type="none" w="med" len="med"/>
+                      <a:tailEnd type="none" w="med" len="med"/>
+                    </a:lnT>
+                    <a:lnB w="12700" cap="flat" cmpd="sng" algn="ctr">
+                      <a:solidFill>
+                        <a:schemeClr val="tx1"/>
+                      </a:solidFill>
+                      <a:prstDash val="solid"/>
+                      <a:round/>
+                      <a:headEnd type="none" w="med" len="med"/>
+                      <a:tailEnd type="none" w="med" len="med"/>
+                    </a:lnB>
+                    <a:solidFill>
+                      <a:srgbClr val="E8E8E8"/>
+                    </a:solidFill>
+                  </a:tcPr>
+                </a:tc>
+                <a:extLst>
+                  <a:ext uri="{0D108BD9-81ED-4DB2-BD59-A6C34878D82A}">
+                    <a16:rowId xmlns:a16="http://schemas.microsoft.com/office/drawing/2014/main" val="4192647586"/>
+                  </a:ext>
+                </a:extLst>
+              </a:tr>
+            </a:tbl>
+          </a:graphicData>
+        </a:graphic>
+      </p:graphicFrame>
+    </p:spTree>
+    <p:extLst>
+      <p:ext uri="{BB962C8B-B14F-4D97-AF65-F5344CB8AC3E}">
+        <p14:creationId xmlns:p14="http://schemas.microsoft.com/office/powerpoint/2010/main" val="2038049689"/>
+      </p:ext>
+    </p:extLst>
+  </p:cSld>
+  <p:clrMapOvr>
+    <a:masterClrMapping/>
+  </p:clrMapOvr>
+</p:sld>
+</file>
+
+<file path=ppt/slides/slide5.xml><?xml version="1.0" encoding="utf-8"?>
+<p:sld xmlns:a="http://schemas.openxmlformats.org/drawingml/2006/main" xmlns:r="http://schemas.openxmlformats.org/officeDocument/2006/relationships" xmlns:p="http://schemas.openxmlformats.org/presentationml/2006/main">
+  <p:cSld>
+    <p:spTree>
+      <p:nvGrpSpPr>
+        <p:cNvPr id="1" name="">
+          <a:extLst>
+            <a:ext uri="{FF2B5EF4-FFF2-40B4-BE49-F238E27FC236}">
+              <a16:creationId xmlns:a16="http://schemas.microsoft.com/office/drawing/2014/main" id="{B1CE031F-1E27-6414-8F65-D5DA8FDE6DE2}"/>
+            </a:ext>
+          </a:extLst>
+        </p:cNvPr>
+        <p:cNvGrpSpPr/>
+        <p:nvPr/>
+      </p:nvGrpSpPr>
+      <p:grpSpPr>
+        <a:xfrm>
+          <a:off x="0" y="0"/>
+          <a:ext cx="0" cy="0"/>
+          <a:chOff x="0" y="0"/>
+          <a:chExt cx="0" cy="0"/>
+        </a:xfrm>
+      </p:grpSpPr>
+      <p:sp>
+        <p:nvSpPr>
+          <p:cNvPr id="2" name="CaixaDeTexto 1">
+            <a:extLst>
+              <a:ext uri="{FF2B5EF4-FFF2-40B4-BE49-F238E27FC236}">
+                <a16:creationId xmlns:a16="http://schemas.microsoft.com/office/drawing/2014/main" id="{F0A95469-7CBC-E0BA-0488-FF184F4831B5}"/>
+              </a:ext>
+            </a:extLst>
+          </p:cNvPr>
+          <p:cNvSpPr txBox="1"/>
+          <p:nvPr/>
+        </p:nvSpPr>
+        <p:spPr>
+          <a:xfrm>
+            <a:off x="793100" y="1161663"/>
+            <a:ext cx="10647786" cy="523220"/>
+          </a:xfrm>
+          <a:prstGeom prst="rect">
+            <a:avLst/>
+          </a:prstGeom>
+          <a:noFill/>
+        </p:spPr>
+        <p:txBody>
+          <a:bodyPr wrap="square" rtlCol="0">
+            <a:spAutoFit/>
+          </a:bodyPr>
+          <a:lstStyle/>
+          <a:p>
+            <a:pPr algn="just"/>
+            <a:r>
+              <a:rPr lang="pt-BR" sz="2800" b="1" dirty="0">
+                <a:solidFill>
+                  <a:schemeClr val="tx2">
+                    <a:lumMod val="90000"/>
+                    <a:lumOff val="10000"/>
+                  </a:schemeClr>
+                </a:solidFill>
+              </a:rPr>
+              <a:t>1.2 </a:t>
+            </a:r>
+            <a:r>
+              <a:rPr lang="en-US" sz="2800" b="1" dirty="0" err="1">
+                <a:solidFill>
+                  <a:schemeClr val="tx2">
+                    <a:lumMod val="90000"/>
+                    <a:lumOff val="10000"/>
+                  </a:schemeClr>
+                </a:solidFill>
+              </a:rPr>
+              <a:t>Observáveis</a:t>
+            </a:r>
+            <a:r>
+              <a:rPr lang="en-US" sz="2800" b="1" dirty="0">
+                <a:solidFill>
+                  <a:schemeClr val="tx2">
+                    <a:lumMod val="90000"/>
+                    <a:lumOff val="10000"/>
+                  </a:schemeClr>
+                </a:solidFill>
+              </a:rPr>
+              <a:t> </a:t>
+            </a:r>
+            <a:r>
+              <a:rPr lang="en-US" sz="2800" b="1" dirty="0" err="1">
+                <a:solidFill>
+                  <a:schemeClr val="tx2">
+                    <a:lumMod val="90000"/>
+                    <a:lumOff val="10000"/>
+                  </a:schemeClr>
+                </a:solidFill>
+              </a:rPr>
+              <a:t>Prioritários</a:t>
+            </a:r>
+            <a:r>
+              <a:rPr lang="en-US" sz="2800" b="1" dirty="0">
+                <a:solidFill>
+                  <a:schemeClr val="tx2">
+                    <a:lumMod val="90000"/>
+                    <a:lumOff val="10000"/>
+                  </a:schemeClr>
+                </a:solidFill>
+              </a:rPr>
+              <a:t> e </a:t>
+            </a:r>
+            <a:r>
+              <a:rPr lang="en-US" sz="2800" b="1" dirty="0" err="1">
+                <a:solidFill>
+                  <a:schemeClr val="tx2">
+                    <a:lumMod val="90000"/>
+                    <a:lumOff val="10000"/>
+                  </a:schemeClr>
+                </a:solidFill>
+              </a:rPr>
+              <a:t>Exclusões</a:t>
+            </a:r>
+            <a:r>
+              <a:rPr lang="en-US" sz="2800" b="1" dirty="0">
+                <a:solidFill>
+                  <a:schemeClr val="tx2">
+                    <a:lumMod val="90000"/>
+                    <a:lumOff val="10000"/>
+                  </a:schemeClr>
+                </a:solidFill>
+              </a:rPr>
+              <a:t> </a:t>
+            </a:r>
+            <a:r>
+              <a:rPr lang="en-US" sz="2800" b="1" dirty="0" err="1">
+                <a:solidFill>
+                  <a:schemeClr val="tx2">
+                    <a:lumMod val="90000"/>
+                    <a:lumOff val="10000"/>
+                  </a:schemeClr>
+                </a:solidFill>
+              </a:rPr>
+              <a:t>Conscientes</a:t>
+            </a:r>
+            <a:endParaRPr lang="en-US" sz="2800" b="1" dirty="0">
+              <a:solidFill>
+                <a:schemeClr val="tx2">
+                  <a:lumMod val="90000"/>
+                  <a:lumOff val="10000"/>
+                </a:schemeClr>
+              </a:solidFill>
+            </a:endParaRPr>
+          </a:p>
+        </p:txBody>
+      </p:sp>
+      <p:sp>
+        <p:nvSpPr>
+          <p:cNvPr id="3" name="Shape 1">
+            <a:extLst>
+              <a:ext uri="{FF2B5EF4-FFF2-40B4-BE49-F238E27FC236}">
+                <a16:creationId xmlns:a16="http://schemas.microsoft.com/office/drawing/2014/main" id="{BBF1773F-1B89-134E-915F-04F52C177C72}"/>
+              </a:ext>
+            </a:extLst>
+          </p:cNvPr>
+          <p:cNvSpPr/>
+          <p:nvPr/>
+        </p:nvSpPr>
+        <p:spPr>
+          <a:xfrm>
+            <a:off x="793099" y="2081872"/>
+            <a:ext cx="4680489" cy="491490"/>
+          </a:xfrm>
+          <a:prstGeom prst="rect">
+            <a:avLst/>
+          </a:prstGeom>
+          <a:solidFill>
+            <a:srgbClr val="156082"/>
+          </a:solidFill>
+          <a:ln/>
+        </p:spPr>
+        <p:txBody>
+          <a:bodyPr/>
+          <a:lstStyle/>
+          <a:p>
+            <a:endParaRPr lang="pt-BR" dirty="0"/>
+          </a:p>
+        </p:txBody>
+      </p:sp>
+      <p:sp>
+        <p:nvSpPr>
+          <p:cNvPr id="4" name="Text 2">
+            <a:extLst>
+              <a:ext uri="{FF2B5EF4-FFF2-40B4-BE49-F238E27FC236}">
+                <a16:creationId xmlns:a16="http://schemas.microsoft.com/office/drawing/2014/main" id="{1621E26D-F7CA-C208-C7C2-DD4B24D819EE}"/>
+              </a:ext>
+            </a:extLst>
+          </p:cNvPr>
+          <p:cNvSpPr/>
+          <p:nvPr/>
+        </p:nvSpPr>
+        <p:spPr>
+          <a:xfrm>
+            <a:off x="793099" y="2107355"/>
+            <a:ext cx="4680489" cy="491490"/>
+          </a:xfrm>
+          <a:prstGeom prst="rect">
+            <a:avLst/>
+          </a:prstGeom>
+          <a:noFill/>
+          <a:ln/>
+        </p:spPr>
+        <p:txBody>
+          <a:bodyPr wrap="square" lIns="0" tIns="0" rIns="0" bIns="0" rtlCol="0" anchor="ctr"/>
+          <a:lstStyle/>
+          <a:p>
+            <a:pPr marL="0" indent="0" algn="ctr">
+              <a:buNone/>
+            </a:pPr>
+            <a:r>
+              <a:rPr lang="en-US" sz="1300" b="1" dirty="0">
+                <a:solidFill>
+                  <a:srgbClr val="FFFFFF"/>
+                </a:solidFill>
+                <a:ea typeface="Calibri" panose="020F0502020204030204" pitchFamily="34" charset="0"/>
+                <a:cs typeface="Calibri" panose="020F0502020204030204" pitchFamily="34" charset="0"/>
+              </a:rPr>
+              <a:t>Observáveis Prioritários</a:t>
+            </a:r>
+            <a:endParaRPr lang="en-US" sz="1300" dirty="0">
+              <a:ea typeface="Calibri" panose="020F0502020204030204" pitchFamily="34" charset="0"/>
+              <a:cs typeface="Calibri" panose="020F0502020204030204" pitchFamily="34" charset="0"/>
+            </a:endParaRPr>
+          </a:p>
+        </p:txBody>
+      </p:sp>
+      <p:graphicFrame>
+        <p:nvGraphicFramePr>
+          <p:cNvPr id="5" name="Table 0">
+            <a:extLst>
+              <a:ext uri="{FF2B5EF4-FFF2-40B4-BE49-F238E27FC236}">
+                <a16:creationId xmlns:a16="http://schemas.microsoft.com/office/drawing/2014/main" id="{1BE1A9AF-5CF9-1CB5-98E5-1A6C2A3A6C47}"/>
+              </a:ext>
+            </a:extLst>
+          </p:cNvPr>
+          <p:cNvGraphicFramePr>
+            <a:graphicFrameLocks noGrp="1"/>
+          </p:cNvGraphicFramePr>
+          <p:nvPr>
+            <p:extLst>
+              <p:ext uri="{D42A27DB-BD31-4B8C-83A1-F6EECF244321}">
+                <p14:modId xmlns:p14="http://schemas.microsoft.com/office/powerpoint/2010/main" val="1355182721"/>
+              </p:ext>
+            </p:extLst>
+          </p:nvPr>
+        </p:nvGraphicFramePr>
+        <p:xfrm>
+          <a:off x="793099" y="2624328"/>
+          <a:ext cx="4680488" cy="3145539"/>
+        </p:xfrm>
+        <a:graphic>
+          <a:graphicData uri="http://schemas.openxmlformats.org/drawingml/2006/table">
+            <a:tbl>
+              <a:tblPr/>
+              <a:tblGrid>
+                <a:gridCol w="1738467">
+                  <a:extLst>
+                    <a:ext uri="{9D8B030D-6E8A-4147-A177-3AD203B41FA5}">
+                      <a16:colId xmlns:a16="http://schemas.microsoft.com/office/drawing/2014/main" val="20001"/>
+                    </a:ext>
+                  </a:extLst>
+                </a:gridCol>
+                <a:gridCol w="2942021">
+                  <a:extLst>
+                    <a:ext uri="{9D8B030D-6E8A-4147-A177-3AD203B41FA5}">
+                      <a16:colId xmlns:a16="http://schemas.microsoft.com/office/drawing/2014/main" val="20002"/>
+                    </a:ext>
+                  </a:extLst>
+                </a:gridCol>
+              </a:tblGrid>
+              <a:tr h="344043">
+                <a:tc>
+                  <a:txBody>
+                    <a:bodyPr/>
+                    <a:lstStyle/>
+                    <a:p>
+                      <a:pPr marL="0" indent="0" algn="l">
+                        <a:buNone/>
+                      </a:pPr>
+                      <a:r>
+                        <a:rPr lang="en-US" sz="1200" b="1" dirty="0">
+                          <a:solidFill>
+                            <a:srgbClr val="FFFFFF"/>
+                          </a:solidFill>
+                          <a:latin typeface="+mn-lt"/>
+                          <a:ea typeface="Calibri" pitchFamily="34" charset="-122"/>
+                          <a:cs typeface="Calibri" pitchFamily="34" charset="-120"/>
+                        </a:rPr>
+                        <a:t>Observável</a:t>
+                      </a:r>
+                      <a:endParaRPr lang="en-US" sz="1200" dirty="0">
+                        <a:latin typeface="+mn-lt"/>
+                        <a:ea typeface="Calibri" charset="0"/>
+                        <a:cs typeface="Calibri" charset="0"/>
+                      </a:endParaRPr>
+                    </a:p>
+                  </a:txBody>
+                  <a:tcPr marL="50800" marR="50800" marT="38100" marB="38100" anchor="ctr">
+                    <a:lnL w="12700" cap="flat" cmpd="sng" algn="ctr">
+                      <a:solidFill>
+                        <a:schemeClr val="tx1"/>
+                      </a:solidFill>
+                      <a:prstDash val="solid"/>
+                      <a:round/>
+                      <a:headEnd type="none" w="med" len="med"/>
+                      <a:tailEnd type="none" w="med" len="med"/>
+                    </a:lnL>
+                    <a:lnR w="12700" cap="flat" cmpd="sng" algn="ctr">
+                      <a:solidFill>
+                        <a:schemeClr val="tx1"/>
+                      </a:solidFill>
+                      <a:prstDash val="solid"/>
+                      <a:round/>
+                      <a:headEnd type="none" w="med" len="med"/>
+                      <a:tailEnd type="none" w="med" len="med"/>
+                    </a:lnR>
+                    <a:lnT w="12700" cap="flat" cmpd="sng" algn="ctr">
+                      <a:solidFill>
+                        <a:schemeClr val="tx1"/>
+                      </a:solidFill>
+                      <a:prstDash val="solid"/>
+                      <a:round/>
+                      <a:headEnd type="none" w="med" len="med"/>
+                      <a:tailEnd type="none" w="med" len="med"/>
+                    </a:lnT>
+                    <a:lnB w="12700" cap="flat" cmpd="sng" algn="ctr">
+                      <a:solidFill>
+                        <a:schemeClr val="tx1"/>
+                      </a:solidFill>
+                      <a:prstDash val="solid"/>
+                      <a:round/>
+                      <a:headEnd type="none" w="med" len="med"/>
+                      <a:tailEnd type="none" w="med" len="med"/>
+                    </a:lnB>
+                    <a:solidFill>
+                      <a:srgbClr val="0E2841"/>
+                    </a:solidFill>
+                  </a:tcPr>
+                </a:tc>
+                <a:tc>
+                  <a:txBody>
+                    <a:bodyPr/>
+                    <a:lstStyle/>
+                    <a:p>
+                      <a:pPr marL="0" indent="0" algn="l">
+                        <a:buNone/>
+                      </a:pPr>
+                      <a:r>
+                        <a:rPr lang="en-US" sz="1200" b="1" dirty="0">
+                          <a:solidFill>
+                            <a:srgbClr val="FFFFFF"/>
+                          </a:solidFill>
+                          <a:latin typeface="+mn-lt"/>
+                          <a:ea typeface="Calibri" pitchFamily="34" charset="-122"/>
+                          <a:cs typeface="Calibri" pitchFamily="34" charset="-120"/>
+                        </a:rPr>
+                        <a:t>Descrição</a:t>
+                      </a:r>
+                      <a:endParaRPr lang="en-US" sz="1200" dirty="0">
+                        <a:latin typeface="+mn-lt"/>
+                        <a:ea typeface="Calibri" charset="0"/>
+                        <a:cs typeface="Calibri" charset="0"/>
+                      </a:endParaRPr>
+                    </a:p>
+                  </a:txBody>
+                  <a:tcPr marL="50800" marR="50800" marT="38100" marB="38100" anchor="ctr">
+                    <a:lnL w="12700" cap="flat" cmpd="sng" algn="ctr">
+                      <a:solidFill>
+                        <a:schemeClr val="tx1"/>
+                      </a:solidFill>
+                      <a:prstDash val="solid"/>
+                      <a:round/>
+                      <a:headEnd type="none" w="med" len="med"/>
+                      <a:tailEnd type="none" w="med" len="med"/>
+                    </a:lnL>
+                    <a:lnR w="12700" cap="flat" cmpd="sng" algn="ctr">
+                      <a:solidFill>
+                        <a:schemeClr val="tx1"/>
+                      </a:solidFill>
+                      <a:prstDash val="solid"/>
+                      <a:round/>
+                      <a:headEnd type="none" w="med" len="med"/>
+                      <a:tailEnd type="none" w="med" len="med"/>
+                    </a:lnR>
+                    <a:lnT w="12700" cap="flat" cmpd="sng" algn="ctr">
+                      <a:solidFill>
+                        <a:schemeClr val="tx1"/>
+                      </a:solidFill>
+                      <a:prstDash val="solid"/>
+                      <a:round/>
+                      <a:headEnd type="none" w="med" len="med"/>
+                      <a:tailEnd type="none" w="med" len="med"/>
+                    </a:lnT>
+                    <a:lnB w="12700" cap="flat" cmpd="sng" algn="ctr">
+                      <a:solidFill>
+                        <a:schemeClr val="tx1"/>
+                      </a:solidFill>
+                      <a:prstDash val="solid"/>
+                      <a:round/>
+                      <a:headEnd type="none" w="med" len="med"/>
+                      <a:tailEnd type="none" w="med" len="med"/>
+                    </a:lnB>
+                    <a:solidFill>
+                      <a:srgbClr val="0E2841"/>
+                    </a:solidFill>
+                  </a:tcPr>
+                </a:tc>
+                <a:extLst>
+                  <a:ext uri="{0D108BD9-81ED-4DB2-BD59-A6C34878D82A}">
+                    <a16:rowId xmlns:a16="http://schemas.microsoft.com/office/drawing/2014/main" val="10000"/>
+                  </a:ext>
+                </a:extLst>
+              </a:tr>
+              <a:tr h="466916">
+                <a:tc>
+                  <a:txBody>
+                    <a:bodyPr/>
+                    <a:lstStyle/>
+                    <a:p>
+                      <a:pPr marL="0" indent="0">
+                        <a:buNone/>
+                      </a:pPr>
+                      <a:r>
+                        <a:rPr lang="en-US" sz="1100" b="1" dirty="0">
+                          <a:solidFill>
+                            <a:srgbClr val="0E2841"/>
+                          </a:solidFill>
+                          <a:latin typeface="+mn-lt"/>
+                          <a:ea typeface="Calibri" pitchFamily="34" charset="-122"/>
+                          <a:cs typeface="Calibri" pitchFamily="34" charset="-120"/>
+                        </a:rPr>
+                        <a:t>Taxa de evacuação</a:t>
+                      </a:r>
+                      <a:endParaRPr lang="en-US" sz="1100" dirty="0">
+                        <a:latin typeface="+mn-lt"/>
+                        <a:ea typeface="Calibri" charset="0"/>
+                        <a:cs typeface="Calibri" charset="0"/>
+                      </a:endParaRPr>
+                    </a:p>
+                  </a:txBody>
+                  <a:tcPr marL="50800" marR="50800" marT="38100" marB="38100" anchor="ctr">
+                    <a:lnL w="12700" cap="flat" cmpd="sng" algn="ctr">
+                      <a:solidFill>
+                        <a:schemeClr val="tx1"/>
+                      </a:solidFill>
+                      <a:prstDash val="solid"/>
+                      <a:round/>
+                      <a:headEnd type="none" w="med" len="med"/>
+                      <a:tailEnd type="none" w="med" len="med"/>
+                    </a:lnL>
+                    <a:lnR w="12700" cap="flat" cmpd="sng" algn="ctr">
+                      <a:solidFill>
+                        <a:schemeClr val="tx1"/>
+                      </a:solidFill>
+                      <a:prstDash val="solid"/>
+                      <a:round/>
+                      <a:headEnd type="none" w="med" len="med"/>
+                      <a:tailEnd type="none" w="med" len="med"/>
+                    </a:lnR>
+                    <a:lnT w="12700" cap="flat" cmpd="sng" algn="ctr">
+                      <a:solidFill>
+                        <a:schemeClr val="tx1"/>
+                      </a:solidFill>
+                      <a:prstDash val="solid"/>
+                      <a:round/>
+                      <a:headEnd type="none" w="med" len="med"/>
+                      <a:tailEnd type="none" w="med" len="med"/>
+                    </a:lnT>
+                    <a:lnB w="12700" cap="flat" cmpd="sng" algn="ctr">
+                      <a:solidFill>
+                        <a:schemeClr val="tx1"/>
+                      </a:solidFill>
+                      <a:prstDash val="solid"/>
+                      <a:round/>
+                      <a:headEnd type="none" w="med" len="med"/>
+                      <a:tailEnd type="none" w="med" len="med"/>
+                    </a:lnB>
+                    <a:solidFill>
+                      <a:srgbClr val="E8E8E8"/>
+                    </a:solidFill>
+                  </a:tcPr>
+                </a:tc>
+                <a:tc>
+                  <a:txBody>
+                    <a:bodyPr/>
+                    <a:lstStyle/>
+                    <a:p>
+                      <a:pPr marL="0" indent="0">
+                        <a:buNone/>
+                      </a:pPr>
+                      <a:r>
+                        <a:rPr lang="en-US" sz="1100" dirty="0">
+                          <a:solidFill>
+                            <a:srgbClr val="4A5568"/>
+                          </a:solidFill>
+                          <a:latin typeface="+mn-lt"/>
+                          <a:ea typeface="Calibri" pitchFamily="34" charset="-122"/>
+                          <a:cs typeface="Calibri" pitchFamily="34" charset="-120"/>
+                        </a:rPr>
+                        <a:t>Evacuados / total ao término</a:t>
+                      </a:r>
+                      <a:endParaRPr lang="en-US" sz="1100" dirty="0">
+                        <a:latin typeface="+mn-lt"/>
+                        <a:ea typeface="Calibri" charset="0"/>
+                        <a:cs typeface="Calibri" charset="0"/>
+                      </a:endParaRPr>
+                    </a:p>
+                  </a:txBody>
+                  <a:tcPr marL="50800" marR="50800" marT="38100" marB="38100" anchor="ctr">
+                    <a:lnL w="12700" cap="flat" cmpd="sng" algn="ctr">
+                      <a:solidFill>
+                        <a:schemeClr val="tx1"/>
+                      </a:solidFill>
+                      <a:prstDash val="solid"/>
+                      <a:round/>
+                      <a:headEnd type="none" w="med" len="med"/>
+                      <a:tailEnd type="none" w="med" len="med"/>
+                    </a:lnL>
+                    <a:lnR w="12700" cap="flat" cmpd="sng" algn="ctr">
+                      <a:solidFill>
+                        <a:schemeClr val="tx1"/>
+                      </a:solidFill>
+                      <a:prstDash val="solid"/>
+                      <a:round/>
+                      <a:headEnd type="none" w="med" len="med"/>
+                      <a:tailEnd type="none" w="med" len="med"/>
+                    </a:lnR>
+                    <a:lnT w="12700" cap="flat" cmpd="sng" algn="ctr">
+                      <a:solidFill>
+                        <a:schemeClr val="tx1"/>
+                      </a:solidFill>
+                      <a:prstDash val="solid"/>
+                      <a:round/>
+                      <a:headEnd type="none" w="med" len="med"/>
+                      <a:tailEnd type="none" w="med" len="med"/>
+                    </a:lnT>
+                    <a:lnB w="12700" cap="flat" cmpd="sng" algn="ctr">
+                      <a:solidFill>
+                        <a:schemeClr val="tx1"/>
+                      </a:solidFill>
+                      <a:prstDash val="solid"/>
+                      <a:round/>
+                      <a:headEnd type="none" w="med" len="med"/>
+                      <a:tailEnd type="none" w="med" len="med"/>
+                    </a:lnB>
+                    <a:solidFill>
+                      <a:srgbClr val="E8E8E8"/>
+                    </a:solidFill>
+                  </a:tcPr>
+                </a:tc>
+                <a:extLst>
+                  <a:ext uri="{0D108BD9-81ED-4DB2-BD59-A6C34878D82A}">
+                    <a16:rowId xmlns:a16="http://schemas.microsoft.com/office/drawing/2014/main" val="10001"/>
+                  </a:ext>
+                </a:extLst>
+              </a:tr>
+              <a:tr h="466916">
+                <a:tc>
+                  <a:txBody>
+                    <a:bodyPr/>
+                    <a:lstStyle/>
+                    <a:p>
+                      <a:pPr marL="0" indent="0">
+                        <a:buNone/>
+                      </a:pPr>
+                      <a:r>
+                        <a:rPr lang="en-US" sz="1100" b="1" dirty="0">
+                          <a:solidFill>
+                            <a:srgbClr val="0E2841"/>
+                          </a:solidFill>
+                          <a:latin typeface="+mn-lt"/>
+                          <a:ea typeface="Calibri" pitchFamily="34" charset="-122"/>
+                          <a:cs typeface="Calibri" pitchFamily="34" charset="-120"/>
+                        </a:rPr>
+                        <a:t>Tempo médio de evacuação</a:t>
+                      </a:r>
+                      <a:endParaRPr lang="en-US" sz="1100" dirty="0">
+                        <a:latin typeface="+mn-lt"/>
+                        <a:ea typeface="Calibri" charset="0"/>
+                        <a:cs typeface="Calibri" charset="0"/>
+                      </a:endParaRPr>
+                    </a:p>
+                  </a:txBody>
+                  <a:tcPr marL="50800" marR="50800" marT="38100" marB="38100" anchor="ctr">
+                    <a:lnL w="12700" cap="flat" cmpd="sng" algn="ctr">
+                      <a:solidFill>
+                        <a:schemeClr val="tx1"/>
+                      </a:solidFill>
+                      <a:prstDash val="solid"/>
+                      <a:round/>
+                      <a:headEnd type="none" w="med" len="med"/>
+                      <a:tailEnd type="none" w="med" len="med"/>
+                    </a:lnL>
+                    <a:lnR w="12700" cap="flat" cmpd="sng" algn="ctr">
+                      <a:solidFill>
+                        <a:schemeClr val="tx1"/>
+                      </a:solidFill>
+                      <a:prstDash val="solid"/>
+                      <a:round/>
+                      <a:headEnd type="none" w="med" len="med"/>
+                      <a:tailEnd type="none" w="med" len="med"/>
+                    </a:lnR>
+                    <a:lnT w="12700" cap="flat" cmpd="sng" algn="ctr">
+                      <a:solidFill>
+                        <a:schemeClr val="tx1"/>
+                      </a:solidFill>
+                      <a:prstDash val="solid"/>
+                      <a:round/>
+                      <a:headEnd type="none" w="med" len="med"/>
+                      <a:tailEnd type="none" w="med" len="med"/>
+                    </a:lnT>
+                    <a:lnB w="12700" cap="flat" cmpd="sng" algn="ctr">
+                      <a:solidFill>
+                        <a:schemeClr val="tx1"/>
+                      </a:solidFill>
+                      <a:prstDash val="solid"/>
+                      <a:round/>
+                      <a:headEnd type="none" w="med" len="med"/>
+                      <a:tailEnd type="none" w="med" len="med"/>
+                    </a:lnB>
+                    <a:solidFill>
+                      <a:srgbClr val="EDF2F7"/>
+                    </a:solidFill>
+                  </a:tcPr>
+                </a:tc>
+                <a:tc>
+                  <a:txBody>
+                    <a:bodyPr/>
+                    <a:lstStyle/>
+                    <a:p>
+                      <a:pPr marL="0" indent="0">
+                        <a:buNone/>
+                      </a:pPr>
+                      <a:r>
+                        <a:rPr lang="en-US" sz="1100" dirty="0">
+                          <a:solidFill>
+                            <a:srgbClr val="4A5568"/>
+                          </a:solidFill>
+                          <a:latin typeface="+mn-lt"/>
+                          <a:ea typeface="Calibri" pitchFamily="34" charset="-122"/>
+                          <a:cs typeface="Calibri" pitchFamily="34" charset="-120"/>
+                        </a:rPr>
+                        <a:t>Média e σ de steps por andar e total</a:t>
+                      </a:r>
+                      <a:endParaRPr lang="en-US" sz="1100" dirty="0">
+                        <a:latin typeface="+mn-lt"/>
+                        <a:ea typeface="Calibri" charset="0"/>
+                        <a:cs typeface="Calibri" charset="0"/>
+                      </a:endParaRPr>
+                    </a:p>
+                  </a:txBody>
+                  <a:tcPr marL="50800" marR="50800" marT="38100" marB="38100" anchor="ctr">
+                    <a:lnL w="12700" cap="flat" cmpd="sng" algn="ctr">
+                      <a:solidFill>
+                        <a:schemeClr val="tx1"/>
+                      </a:solidFill>
+                      <a:prstDash val="solid"/>
+                      <a:round/>
+                      <a:headEnd type="none" w="med" len="med"/>
+                      <a:tailEnd type="none" w="med" len="med"/>
+                    </a:lnL>
+                    <a:lnR w="12700" cap="flat" cmpd="sng" algn="ctr">
+                      <a:solidFill>
+                        <a:schemeClr val="tx1"/>
+                      </a:solidFill>
+                      <a:prstDash val="solid"/>
+                      <a:round/>
+                      <a:headEnd type="none" w="med" len="med"/>
+                      <a:tailEnd type="none" w="med" len="med"/>
+                    </a:lnR>
+                    <a:lnT w="12700" cap="flat" cmpd="sng" algn="ctr">
+                      <a:solidFill>
+                        <a:schemeClr val="tx1"/>
+                      </a:solidFill>
+                      <a:prstDash val="solid"/>
+                      <a:round/>
+                      <a:headEnd type="none" w="med" len="med"/>
+                      <a:tailEnd type="none" w="med" len="med"/>
+                    </a:lnT>
+                    <a:lnB w="12700" cap="flat" cmpd="sng" algn="ctr">
+                      <a:solidFill>
+                        <a:schemeClr val="tx1"/>
+                      </a:solidFill>
+                      <a:prstDash val="solid"/>
+                      <a:round/>
+                      <a:headEnd type="none" w="med" len="med"/>
+                      <a:tailEnd type="none" w="med" len="med"/>
+                    </a:lnB>
+                    <a:solidFill>
+                      <a:srgbClr val="EDF2F7"/>
+                    </a:solidFill>
+                  </a:tcPr>
+                </a:tc>
+                <a:extLst>
+                  <a:ext uri="{0D108BD9-81ED-4DB2-BD59-A6C34878D82A}">
+                    <a16:rowId xmlns:a16="http://schemas.microsoft.com/office/drawing/2014/main" val="10002"/>
+                  </a:ext>
+                </a:extLst>
+              </a:tr>
+              <a:tr h="466916">
+                <a:tc>
+                  <a:txBody>
+                    <a:bodyPr/>
+                    <a:lstStyle/>
+                    <a:p>
+                      <a:pPr marL="0" indent="0">
+                        <a:buNone/>
+                      </a:pPr>
+                      <a:r>
+                        <a:rPr lang="en-US" sz="1100" b="1" dirty="0">
+                          <a:solidFill>
+                            <a:srgbClr val="0E2841"/>
+                          </a:solidFill>
+                          <a:latin typeface="+mn-lt"/>
+                          <a:ea typeface="Calibri" pitchFamily="34" charset="-122"/>
+                          <a:cs typeface="Calibri" pitchFamily="34" charset="-120"/>
+                        </a:rPr>
+                        <a:t>Nº de vítimas</a:t>
+                      </a:r>
+                      <a:endParaRPr lang="en-US" sz="1100" dirty="0">
+                        <a:latin typeface="+mn-lt"/>
+                        <a:ea typeface="Calibri" charset="0"/>
+                        <a:cs typeface="Calibri" charset="0"/>
+                      </a:endParaRPr>
+                    </a:p>
+                  </a:txBody>
+                  <a:tcPr marL="50800" marR="50800" marT="38100" marB="38100" anchor="ctr">
+                    <a:lnL w="12700" cap="flat" cmpd="sng" algn="ctr">
+                      <a:solidFill>
+                        <a:schemeClr val="tx1"/>
+                      </a:solidFill>
+                      <a:prstDash val="solid"/>
+                      <a:round/>
+                      <a:headEnd type="none" w="med" len="med"/>
+                      <a:tailEnd type="none" w="med" len="med"/>
+                    </a:lnL>
+                    <a:lnR w="12700" cap="flat" cmpd="sng" algn="ctr">
+                      <a:solidFill>
+                        <a:schemeClr val="tx1"/>
+                      </a:solidFill>
+                      <a:prstDash val="solid"/>
+                      <a:round/>
+                      <a:headEnd type="none" w="med" len="med"/>
+                      <a:tailEnd type="none" w="med" len="med"/>
+                    </a:lnR>
+                    <a:lnT w="12700" cap="flat" cmpd="sng" algn="ctr">
+                      <a:solidFill>
+                        <a:schemeClr val="tx1"/>
+                      </a:solidFill>
+                      <a:prstDash val="solid"/>
+                      <a:round/>
+                      <a:headEnd type="none" w="med" len="med"/>
+                      <a:tailEnd type="none" w="med" len="med"/>
+                    </a:lnT>
+                    <a:lnB w="12700" cap="flat" cmpd="sng" algn="ctr">
+                      <a:solidFill>
+                        <a:schemeClr val="tx1"/>
+                      </a:solidFill>
+                      <a:prstDash val="solid"/>
+                      <a:round/>
+                      <a:headEnd type="none" w="med" len="med"/>
+                      <a:tailEnd type="none" w="med" len="med"/>
+                    </a:lnB>
+                    <a:solidFill>
+                      <a:srgbClr val="E8E8E8"/>
+                    </a:solidFill>
+                  </a:tcPr>
+                </a:tc>
+                <a:tc>
+                  <a:txBody>
+                    <a:bodyPr/>
+                    <a:lstStyle/>
+                    <a:p>
+                      <a:pPr marL="0" indent="0">
+                        <a:buNone/>
+                      </a:pPr>
+                      <a:r>
+                        <a:rPr lang="en-US" sz="1100" dirty="0">
+                          <a:solidFill>
+                            <a:srgbClr val="4A5568"/>
+                          </a:solidFill>
+                          <a:latin typeface="+mn-lt"/>
+                          <a:ea typeface="Calibri" pitchFamily="34" charset="-122"/>
+                          <a:cs typeface="Calibri" pitchFamily="34" charset="-120"/>
+                        </a:rPr>
+                        <a:t>Mortos + feridos por rodada</a:t>
+                      </a:r>
+                      <a:endParaRPr lang="en-US" sz="1100" dirty="0">
+                        <a:latin typeface="+mn-lt"/>
+                        <a:ea typeface="Calibri" charset="0"/>
+                        <a:cs typeface="Calibri" charset="0"/>
+                      </a:endParaRPr>
+                    </a:p>
+                  </a:txBody>
+                  <a:tcPr marL="50800" marR="50800" marT="38100" marB="38100" anchor="ctr">
+                    <a:lnL w="12700" cap="flat" cmpd="sng" algn="ctr">
+                      <a:solidFill>
+                        <a:schemeClr val="tx1"/>
+                      </a:solidFill>
+                      <a:prstDash val="solid"/>
+                      <a:round/>
+                      <a:headEnd type="none" w="med" len="med"/>
+                      <a:tailEnd type="none" w="med" len="med"/>
+                    </a:lnL>
+                    <a:lnR w="12700" cap="flat" cmpd="sng" algn="ctr">
+                      <a:solidFill>
+                        <a:schemeClr val="tx1"/>
+                      </a:solidFill>
+                      <a:prstDash val="solid"/>
+                      <a:round/>
+                      <a:headEnd type="none" w="med" len="med"/>
+                      <a:tailEnd type="none" w="med" len="med"/>
+                    </a:lnR>
+                    <a:lnT w="12700" cap="flat" cmpd="sng" algn="ctr">
+                      <a:solidFill>
+                        <a:schemeClr val="tx1"/>
+                      </a:solidFill>
+                      <a:prstDash val="solid"/>
+                      <a:round/>
+                      <a:headEnd type="none" w="med" len="med"/>
+                      <a:tailEnd type="none" w="med" len="med"/>
+                    </a:lnT>
+                    <a:lnB w="12700" cap="flat" cmpd="sng" algn="ctr">
+                      <a:solidFill>
+                        <a:schemeClr val="tx1"/>
+                      </a:solidFill>
+                      <a:prstDash val="solid"/>
+                      <a:round/>
+                      <a:headEnd type="none" w="med" len="med"/>
+                      <a:tailEnd type="none" w="med" len="med"/>
+                    </a:lnB>
+                    <a:solidFill>
+                      <a:srgbClr val="E8E8E8"/>
+                    </a:solidFill>
+                  </a:tcPr>
+                </a:tc>
+                <a:extLst>
+                  <a:ext uri="{0D108BD9-81ED-4DB2-BD59-A6C34878D82A}">
+                    <a16:rowId xmlns:a16="http://schemas.microsoft.com/office/drawing/2014/main" val="10003"/>
+                  </a:ext>
+                </a:extLst>
+              </a:tr>
+              <a:tr h="466916">
+                <a:tc>
+                  <a:txBody>
+                    <a:bodyPr/>
+                    <a:lstStyle/>
+                    <a:p>
+                      <a:pPr marL="0" indent="0">
+                        <a:buNone/>
+                      </a:pPr>
+                      <a:r>
+                        <a:rPr lang="en-US" sz="1100" b="1" dirty="0">
+                          <a:solidFill>
+                            <a:srgbClr val="0E2841"/>
+                          </a:solidFill>
+                          <a:latin typeface="+mn-lt"/>
+                          <a:ea typeface="Calibri" pitchFamily="34" charset="-122"/>
+                          <a:cs typeface="Calibri" pitchFamily="34" charset="-120"/>
+                        </a:rPr>
+                        <a:t>Mapa de calor</a:t>
+                      </a:r>
+                      <a:endParaRPr lang="en-US" sz="1100" dirty="0">
+                        <a:latin typeface="+mn-lt"/>
+                        <a:ea typeface="Calibri" charset="0"/>
+                        <a:cs typeface="Calibri" charset="0"/>
+                      </a:endParaRPr>
+                    </a:p>
+                  </a:txBody>
+                  <a:tcPr marL="50800" marR="50800" marT="38100" marB="38100" anchor="ctr">
+                    <a:lnL w="12700" cap="flat" cmpd="sng" algn="ctr">
+                      <a:solidFill>
+                        <a:schemeClr val="tx1"/>
+                      </a:solidFill>
+                      <a:prstDash val="solid"/>
+                      <a:round/>
+                      <a:headEnd type="none" w="med" len="med"/>
+                      <a:tailEnd type="none" w="med" len="med"/>
+                    </a:lnL>
+                    <a:lnR w="12700" cap="flat" cmpd="sng" algn="ctr">
+                      <a:solidFill>
+                        <a:schemeClr val="tx1"/>
+                      </a:solidFill>
+                      <a:prstDash val="solid"/>
+                      <a:round/>
+                      <a:headEnd type="none" w="med" len="med"/>
+                      <a:tailEnd type="none" w="med" len="med"/>
+                    </a:lnR>
+                    <a:lnT w="12700" cap="flat" cmpd="sng" algn="ctr">
+                      <a:solidFill>
+                        <a:schemeClr val="tx1"/>
+                      </a:solidFill>
+                      <a:prstDash val="solid"/>
+                      <a:round/>
+                      <a:headEnd type="none" w="med" len="med"/>
+                      <a:tailEnd type="none" w="med" len="med"/>
+                    </a:lnT>
+                    <a:lnB w="12700" cap="flat" cmpd="sng" algn="ctr">
+                      <a:solidFill>
+                        <a:schemeClr val="tx1"/>
+                      </a:solidFill>
+                      <a:prstDash val="solid"/>
+                      <a:round/>
+                      <a:headEnd type="none" w="med" len="med"/>
+                      <a:tailEnd type="none" w="med" len="med"/>
+                    </a:lnB>
+                    <a:solidFill>
+                      <a:srgbClr val="EDF2F7"/>
+                    </a:solidFill>
+                  </a:tcPr>
+                </a:tc>
+                <a:tc>
+                  <a:txBody>
+                    <a:bodyPr/>
+                    <a:lstStyle/>
+                    <a:p>
+                      <a:pPr marL="0" indent="0">
+                        <a:buNone/>
+                      </a:pPr>
+                      <a:r>
+                        <a:rPr lang="en-US" sz="1100" dirty="0">
+                          <a:solidFill>
+                            <a:srgbClr val="4A5568"/>
+                          </a:solidFill>
+                          <a:latin typeface="+mn-lt"/>
+                          <a:ea typeface="Calibri" pitchFamily="34" charset="-122"/>
+                          <a:cs typeface="Calibri" pitchFamily="34" charset="-120"/>
+                        </a:rPr>
+                        <a:t>Densidade acumulada por célula</a:t>
+                      </a:r>
+                      <a:endParaRPr lang="en-US" sz="1100" dirty="0">
+                        <a:latin typeface="+mn-lt"/>
+                        <a:ea typeface="Calibri" charset="0"/>
+                        <a:cs typeface="Calibri" charset="0"/>
+                      </a:endParaRPr>
+                    </a:p>
+                  </a:txBody>
+                  <a:tcPr marL="50800" marR="50800" marT="38100" marB="38100" anchor="ctr">
+                    <a:lnL w="12700" cap="flat" cmpd="sng" algn="ctr">
+                      <a:solidFill>
+                        <a:schemeClr val="tx1"/>
+                      </a:solidFill>
+                      <a:prstDash val="solid"/>
+                      <a:round/>
+                      <a:headEnd type="none" w="med" len="med"/>
+                      <a:tailEnd type="none" w="med" len="med"/>
+                    </a:lnL>
+                    <a:lnR w="12700" cap="flat" cmpd="sng" algn="ctr">
+                      <a:solidFill>
+                        <a:schemeClr val="tx1"/>
+                      </a:solidFill>
+                      <a:prstDash val="solid"/>
+                      <a:round/>
+                      <a:headEnd type="none" w="med" len="med"/>
+                      <a:tailEnd type="none" w="med" len="med"/>
+                    </a:lnR>
+                    <a:lnT w="12700" cap="flat" cmpd="sng" algn="ctr">
+                      <a:solidFill>
+                        <a:schemeClr val="tx1"/>
+                      </a:solidFill>
+                      <a:prstDash val="solid"/>
+                      <a:round/>
+                      <a:headEnd type="none" w="med" len="med"/>
+                      <a:tailEnd type="none" w="med" len="med"/>
+                    </a:lnT>
+                    <a:lnB w="12700" cap="flat" cmpd="sng" algn="ctr">
+                      <a:solidFill>
+                        <a:schemeClr val="tx1"/>
+                      </a:solidFill>
+                      <a:prstDash val="solid"/>
+                      <a:round/>
+                      <a:headEnd type="none" w="med" len="med"/>
+                      <a:tailEnd type="none" w="med" len="med"/>
+                    </a:lnB>
+                    <a:solidFill>
+                      <a:srgbClr val="EDF2F7"/>
+                    </a:solidFill>
+                  </a:tcPr>
+                </a:tc>
+                <a:extLst>
+                  <a:ext uri="{0D108BD9-81ED-4DB2-BD59-A6C34878D82A}">
+                    <a16:rowId xmlns:a16="http://schemas.microsoft.com/office/drawing/2014/main" val="10004"/>
+                  </a:ext>
+                </a:extLst>
+              </a:tr>
+              <a:tr h="466916">
+                <a:tc>
+                  <a:txBody>
+                    <a:bodyPr/>
+                    <a:lstStyle/>
+                    <a:p>
+                      <a:pPr marL="0" indent="0">
+                        <a:buNone/>
+                      </a:pPr>
+                      <a:r>
+                        <a:rPr lang="en-US" sz="1100" b="1" dirty="0">
+                          <a:solidFill>
+                            <a:srgbClr val="0E2841"/>
+                          </a:solidFill>
+                          <a:latin typeface="+mn-lt"/>
+                          <a:ea typeface="Calibri" pitchFamily="34" charset="-122"/>
+                          <a:cs typeface="Calibri" pitchFamily="34" charset="-120"/>
+                        </a:rPr>
+                        <a:t>Gargalos</a:t>
+                      </a:r>
+                      <a:endParaRPr lang="en-US" sz="1100" dirty="0">
+                        <a:latin typeface="+mn-lt"/>
+                        <a:ea typeface="Calibri" charset="0"/>
+                        <a:cs typeface="Calibri" charset="0"/>
+                      </a:endParaRPr>
+                    </a:p>
+                  </a:txBody>
+                  <a:tcPr marL="50800" marR="50800" marT="38100" marB="38100" anchor="ctr">
+                    <a:lnL w="12700" cap="flat" cmpd="sng" algn="ctr">
+                      <a:solidFill>
+                        <a:schemeClr val="tx1"/>
+                      </a:solidFill>
+                      <a:prstDash val="solid"/>
+                      <a:round/>
+                      <a:headEnd type="none" w="med" len="med"/>
+                      <a:tailEnd type="none" w="med" len="med"/>
+                    </a:lnL>
+                    <a:lnR w="12700" cap="flat" cmpd="sng" algn="ctr">
+                      <a:solidFill>
+                        <a:schemeClr val="tx1"/>
+                      </a:solidFill>
+                      <a:prstDash val="solid"/>
+                      <a:round/>
+                      <a:headEnd type="none" w="med" len="med"/>
+                      <a:tailEnd type="none" w="med" len="med"/>
+                    </a:lnR>
+                    <a:lnT w="12700" cap="flat" cmpd="sng" algn="ctr">
+                      <a:solidFill>
+                        <a:schemeClr val="tx1"/>
+                      </a:solidFill>
+                      <a:prstDash val="solid"/>
+                      <a:round/>
+                      <a:headEnd type="none" w="med" len="med"/>
+                      <a:tailEnd type="none" w="med" len="med"/>
+                    </a:lnT>
+                    <a:lnB w="12700" cap="flat" cmpd="sng" algn="ctr">
+                      <a:solidFill>
+                        <a:schemeClr val="tx1"/>
+                      </a:solidFill>
+                      <a:prstDash val="solid"/>
+                      <a:round/>
+                      <a:headEnd type="none" w="med" len="med"/>
+                      <a:tailEnd type="none" w="med" len="med"/>
+                    </a:lnB>
+                    <a:solidFill>
+                      <a:srgbClr val="E8E8E8"/>
+                    </a:solidFill>
+                  </a:tcPr>
+                </a:tc>
+                <a:tc>
+                  <a:txBody>
+                    <a:bodyPr/>
+                    <a:lstStyle/>
+                    <a:p>
+                      <a:pPr marL="0" indent="0">
+                        <a:buNone/>
+                      </a:pPr>
+                      <a:r>
+                        <a:rPr lang="en-US" sz="1100" dirty="0">
+                          <a:solidFill>
+                            <a:srgbClr val="4A5568"/>
+                          </a:solidFill>
+                          <a:latin typeface="+mn-lt"/>
+                          <a:ea typeface="Calibri" pitchFamily="34" charset="-122"/>
+                          <a:cs typeface="Calibri" pitchFamily="34" charset="-120"/>
+                        </a:rPr>
+                        <a:t>Top-5 células com maior congestionamento</a:t>
+                      </a:r>
+                      <a:endParaRPr lang="en-US" sz="1100" dirty="0">
+                        <a:latin typeface="+mn-lt"/>
+                        <a:ea typeface="Calibri" charset="0"/>
+                        <a:cs typeface="Calibri" charset="0"/>
+                      </a:endParaRPr>
+                    </a:p>
+                  </a:txBody>
+                  <a:tcPr marL="50800" marR="50800" marT="38100" marB="38100" anchor="ctr">
+                    <a:lnL w="12700" cap="flat" cmpd="sng" algn="ctr">
+                      <a:solidFill>
+                        <a:schemeClr val="tx1"/>
+                      </a:solidFill>
+                      <a:prstDash val="solid"/>
+                      <a:round/>
+                      <a:headEnd type="none" w="med" len="med"/>
+                      <a:tailEnd type="none" w="med" len="med"/>
+                    </a:lnL>
+                    <a:lnR w="12700" cap="flat" cmpd="sng" algn="ctr">
+                      <a:solidFill>
+                        <a:schemeClr val="tx1"/>
+                      </a:solidFill>
+                      <a:prstDash val="solid"/>
+                      <a:round/>
+                      <a:headEnd type="none" w="med" len="med"/>
+                      <a:tailEnd type="none" w="med" len="med"/>
+                    </a:lnR>
+                    <a:lnT w="12700" cap="flat" cmpd="sng" algn="ctr">
+                      <a:solidFill>
+                        <a:schemeClr val="tx1"/>
+                      </a:solidFill>
+                      <a:prstDash val="solid"/>
+                      <a:round/>
+                      <a:headEnd type="none" w="med" len="med"/>
+                      <a:tailEnd type="none" w="med" len="med"/>
+                    </a:lnT>
+                    <a:lnB w="12700" cap="flat" cmpd="sng" algn="ctr">
+                      <a:solidFill>
+                        <a:schemeClr val="tx1"/>
+                      </a:solidFill>
+                      <a:prstDash val="solid"/>
+                      <a:round/>
+                      <a:headEnd type="none" w="med" len="med"/>
+                      <a:tailEnd type="none" w="med" len="med"/>
+                    </a:lnB>
+                    <a:solidFill>
+                      <a:srgbClr val="E8E8E8"/>
+                    </a:solidFill>
+                  </a:tcPr>
+                </a:tc>
+                <a:extLst>
+                  <a:ext uri="{0D108BD9-81ED-4DB2-BD59-A6C34878D82A}">
+                    <a16:rowId xmlns:a16="http://schemas.microsoft.com/office/drawing/2014/main" val="10005"/>
+                  </a:ext>
+                </a:extLst>
+              </a:tr>
+              <a:tr h="466916">
+                <a:tc>
+                  <a:txBody>
+                    <a:bodyPr/>
+                    <a:lstStyle/>
+                    <a:p>
+                      <a:pPr marL="0" indent="0">
+                        <a:buNone/>
+                      </a:pPr>
+                      <a:r>
+                        <a:rPr lang="en-US" sz="1100" b="1" dirty="0">
+                          <a:solidFill>
+                            <a:srgbClr val="0E2841"/>
+                          </a:solidFill>
+                          <a:latin typeface="+mn-lt"/>
+                          <a:ea typeface="Calibri" pitchFamily="34" charset="-122"/>
+                          <a:cs typeface="Calibri" pitchFamily="34" charset="-120"/>
+                        </a:rPr>
+                        <a:t>Evolução temporal</a:t>
+                      </a:r>
+                      <a:endParaRPr lang="en-US" sz="1100" dirty="0">
+                        <a:latin typeface="+mn-lt"/>
+                        <a:ea typeface="Calibri" charset="0"/>
+                        <a:cs typeface="Calibri" charset="0"/>
+                      </a:endParaRPr>
+                    </a:p>
+                  </a:txBody>
+                  <a:tcPr marL="50800" marR="50800" marT="38100" marB="38100" anchor="ctr">
+                    <a:lnL w="12700" cap="flat" cmpd="sng" algn="ctr">
+                      <a:solidFill>
+                        <a:schemeClr val="tx1"/>
+                      </a:solidFill>
+                      <a:prstDash val="solid"/>
+                      <a:round/>
+                      <a:headEnd type="none" w="med" len="med"/>
+                      <a:tailEnd type="none" w="med" len="med"/>
+                    </a:lnL>
+                    <a:lnR w="12700" cap="flat" cmpd="sng" algn="ctr">
+                      <a:solidFill>
+                        <a:schemeClr val="tx1"/>
+                      </a:solidFill>
+                      <a:prstDash val="solid"/>
+                      <a:round/>
+                      <a:headEnd type="none" w="med" len="med"/>
+                      <a:tailEnd type="none" w="med" len="med"/>
+                    </a:lnR>
+                    <a:lnT w="12700" cap="flat" cmpd="sng" algn="ctr">
+                      <a:solidFill>
+                        <a:schemeClr val="tx1"/>
+                      </a:solidFill>
+                      <a:prstDash val="solid"/>
+                      <a:round/>
+                      <a:headEnd type="none" w="med" len="med"/>
+                      <a:tailEnd type="none" w="med" len="med"/>
+                    </a:lnT>
+                    <a:lnB w="12700" cap="flat" cmpd="sng" algn="ctr">
+                      <a:solidFill>
+                        <a:schemeClr val="tx1"/>
+                      </a:solidFill>
+                      <a:prstDash val="solid"/>
+                      <a:round/>
+                      <a:headEnd type="none" w="med" len="med"/>
+                      <a:tailEnd type="none" w="med" len="med"/>
+                    </a:lnB>
+                    <a:solidFill>
+                      <a:srgbClr val="EDF2F7"/>
+                    </a:solidFill>
+                  </a:tcPr>
+                </a:tc>
+                <a:tc>
+                  <a:txBody>
+                    <a:bodyPr/>
+                    <a:lstStyle/>
+                    <a:p>
+                      <a:pPr marL="0" indent="0">
+                        <a:buNone/>
+                      </a:pPr>
+                      <a:r>
+                        <a:rPr lang="en-US" sz="1100" dirty="0">
+                          <a:solidFill>
+                            <a:srgbClr val="4A5568"/>
+                          </a:solidFill>
+                          <a:latin typeface="+mn-lt"/>
+                          <a:ea typeface="Calibri" pitchFamily="34" charset="-122"/>
+                          <a:cs typeface="Calibri" pitchFamily="34" charset="-120"/>
+                        </a:rPr>
+                        <a:t>Evacuados, mortos e área em chamas por step</a:t>
+                      </a:r>
+                      <a:endParaRPr lang="en-US" sz="1100" dirty="0">
+                        <a:latin typeface="+mn-lt"/>
+                        <a:ea typeface="Calibri" charset="0"/>
+                        <a:cs typeface="Calibri" charset="0"/>
+                      </a:endParaRPr>
+                    </a:p>
+                  </a:txBody>
+                  <a:tcPr marL="50800" marR="50800" marT="38100" marB="38100" anchor="ctr">
+                    <a:lnL w="12700" cap="flat" cmpd="sng" algn="ctr">
+                      <a:solidFill>
+                        <a:schemeClr val="tx1"/>
+                      </a:solidFill>
+                      <a:prstDash val="solid"/>
+                      <a:round/>
+                      <a:headEnd type="none" w="med" len="med"/>
+                      <a:tailEnd type="none" w="med" len="med"/>
+                    </a:lnL>
+                    <a:lnR w="12700" cap="flat" cmpd="sng" algn="ctr">
+                      <a:solidFill>
+                        <a:schemeClr val="tx1"/>
+                      </a:solidFill>
+                      <a:prstDash val="solid"/>
+                      <a:round/>
+                      <a:headEnd type="none" w="med" len="med"/>
+                      <a:tailEnd type="none" w="med" len="med"/>
+                    </a:lnR>
+                    <a:lnT w="12700" cap="flat" cmpd="sng" algn="ctr">
+                      <a:solidFill>
+                        <a:schemeClr val="tx1"/>
+                      </a:solidFill>
+                      <a:prstDash val="solid"/>
+                      <a:round/>
+                      <a:headEnd type="none" w="med" len="med"/>
+                      <a:tailEnd type="none" w="med" len="med"/>
+                    </a:lnT>
+                    <a:lnB w="12700" cap="flat" cmpd="sng" algn="ctr">
+                      <a:solidFill>
+                        <a:schemeClr val="tx1"/>
+                      </a:solidFill>
+                      <a:prstDash val="solid"/>
+                      <a:round/>
+                      <a:headEnd type="none" w="med" len="med"/>
+                      <a:tailEnd type="none" w="med" len="med"/>
+                    </a:lnB>
+                    <a:solidFill>
+                      <a:srgbClr val="EDF2F7"/>
+                    </a:solidFill>
+                  </a:tcPr>
+                </a:tc>
+                <a:extLst>
+                  <a:ext uri="{0D108BD9-81ED-4DB2-BD59-A6C34878D82A}">
+                    <a16:rowId xmlns:a16="http://schemas.microsoft.com/office/drawing/2014/main" val="10006"/>
+                  </a:ext>
+                </a:extLst>
+              </a:tr>
+            </a:tbl>
+          </a:graphicData>
+        </a:graphic>
+      </p:graphicFrame>
+      <p:sp>
+        <p:nvSpPr>
+          <p:cNvPr id="6" name="Shape 3">
+            <a:extLst>
+              <a:ext uri="{FF2B5EF4-FFF2-40B4-BE49-F238E27FC236}">
+                <a16:creationId xmlns:a16="http://schemas.microsoft.com/office/drawing/2014/main" id="{CB057D1B-EEB4-71B4-84CF-B56C9CF8A653}"/>
+              </a:ext>
+            </a:extLst>
+          </p:cNvPr>
+          <p:cNvSpPr/>
+          <p:nvPr/>
+        </p:nvSpPr>
+        <p:spPr>
+          <a:xfrm>
+            <a:off x="6462379" y="2081872"/>
+            <a:ext cx="4748545" cy="491490"/>
+          </a:xfrm>
+          <a:prstGeom prst="rect">
+            <a:avLst/>
+          </a:prstGeom>
+          <a:solidFill>
+            <a:srgbClr val="E97132"/>
+          </a:solidFill>
+          <a:ln/>
+        </p:spPr>
+        <p:txBody>
+          <a:bodyPr/>
+          <a:lstStyle/>
+          <a:p>
+            <a:endParaRPr lang="pt-BR"/>
+          </a:p>
+        </p:txBody>
+      </p:sp>
+      <p:sp>
+        <p:nvSpPr>
+          <p:cNvPr id="7" name="Text 4">
+            <a:extLst>
+              <a:ext uri="{FF2B5EF4-FFF2-40B4-BE49-F238E27FC236}">
+                <a16:creationId xmlns:a16="http://schemas.microsoft.com/office/drawing/2014/main" id="{BC3AD19F-F4AE-219F-8764-5659690DCABD}"/>
+              </a:ext>
+            </a:extLst>
+          </p:cNvPr>
+          <p:cNvSpPr/>
+          <p:nvPr/>
+        </p:nvSpPr>
+        <p:spPr>
+          <a:xfrm>
+            <a:off x="6645449" y="2105945"/>
+            <a:ext cx="4382404" cy="478409"/>
+          </a:xfrm>
+          <a:prstGeom prst="rect">
+            <a:avLst/>
+          </a:prstGeom>
+          <a:noFill/>
+          <a:ln/>
+        </p:spPr>
+        <p:txBody>
+          <a:bodyPr wrap="square" lIns="0" tIns="0" rIns="0" bIns="0" rtlCol="0" anchor="ctr"/>
+          <a:lstStyle/>
+          <a:p>
+            <a:pPr marL="0" indent="0" algn="ctr">
+              <a:buNone/>
+            </a:pPr>
+            <a:r>
+              <a:rPr lang="en-US" sz="1300" b="1" dirty="0">
+                <a:solidFill>
+                  <a:srgbClr val="FFFFFF"/>
+                </a:solidFill>
+                <a:ea typeface="Calibri" panose="020F0502020204030204" pitchFamily="34" charset="0"/>
+                <a:cs typeface="Calibri" panose="020F0502020204030204" pitchFamily="34" charset="0"/>
+              </a:rPr>
+              <a:t>Exclusões Conscientes</a:t>
+            </a:r>
+            <a:endParaRPr lang="en-US" sz="1300" dirty="0">
+              <a:ea typeface="Calibri" panose="020F0502020204030204" pitchFamily="34" charset="0"/>
+              <a:cs typeface="Calibri" panose="020F0502020204030204" pitchFamily="34" charset="0"/>
+            </a:endParaRPr>
+          </a:p>
+        </p:txBody>
+      </p:sp>
+      <p:graphicFrame>
+        <p:nvGraphicFramePr>
+          <p:cNvPr id="8" name="Table 1">
+            <a:extLst>
+              <a:ext uri="{FF2B5EF4-FFF2-40B4-BE49-F238E27FC236}">
+                <a16:creationId xmlns:a16="http://schemas.microsoft.com/office/drawing/2014/main" id="{247B5909-35F1-F6D1-5DBA-E37C86DBAB0E}"/>
+              </a:ext>
+            </a:extLst>
+          </p:cNvPr>
+          <p:cNvGraphicFramePr>
+            <a:graphicFrameLocks noGrp="1"/>
+          </p:cNvGraphicFramePr>
+          <p:nvPr>
+            <p:extLst>
+              <p:ext uri="{D42A27DB-BD31-4B8C-83A1-F6EECF244321}">
+                <p14:modId xmlns:p14="http://schemas.microsoft.com/office/powerpoint/2010/main" val="4250453905"/>
+              </p:ext>
+            </p:extLst>
+          </p:nvPr>
+        </p:nvGraphicFramePr>
+        <p:xfrm>
+          <a:off x="6462379" y="2624328"/>
+          <a:ext cx="4748545" cy="3120058"/>
+        </p:xfrm>
+        <a:graphic>
+          <a:graphicData uri="http://schemas.openxmlformats.org/drawingml/2006/table">
+            <a:tbl>
+              <a:tblPr/>
+              <a:tblGrid>
+                <a:gridCol w="1773552">
+                  <a:extLst>
+                    <a:ext uri="{9D8B030D-6E8A-4147-A177-3AD203B41FA5}">
+                      <a16:colId xmlns:a16="http://schemas.microsoft.com/office/drawing/2014/main" val="20000"/>
+                    </a:ext>
+                  </a:extLst>
+                </a:gridCol>
+                <a:gridCol w="2974993">
+                  <a:extLst>
+                    <a:ext uri="{9D8B030D-6E8A-4147-A177-3AD203B41FA5}">
+                      <a16:colId xmlns:a16="http://schemas.microsoft.com/office/drawing/2014/main" val="20001"/>
+                    </a:ext>
+                  </a:extLst>
+                </a:gridCol>
+              </a:tblGrid>
+              <a:tr h="332173">
+                <a:tc>
+                  <a:txBody>
+                    <a:bodyPr/>
+                    <a:lstStyle/>
+                    <a:p>
+                      <a:pPr marL="0" indent="0" algn="l">
+                        <a:buNone/>
+                      </a:pPr>
+                      <a:r>
+                        <a:rPr lang="en-US" sz="1200" b="1" dirty="0">
+                          <a:solidFill>
+                            <a:srgbClr val="FFFFFF"/>
+                          </a:solidFill>
+                          <a:latin typeface="+mn-lt"/>
+                          <a:ea typeface="Calibri" pitchFamily="34" charset="-122"/>
+                          <a:cs typeface="Calibri" pitchFamily="34" charset="-120"/>
+                        </a:rPr>
+                        <a:t>Elemento Excluído</a:t>
+                      </a:r>
+                      <a:endParaRPr lang="en-US" sz="1200" dirty="0">
+                        <a:latin typeface="+mn-lt"/>
+                        <a:ea typeface="Calibri" charset="0"/>
+                        <a:cs typeface="Calibri" charset="0"/>
+                      </a:endParaRPr>
+                    </a:p>
+                  </a:txBody>
+                  <a:tcPr marL="50800" marR="50800" marT="38100" marB="38100" anchor="ctr">
+                    <a:lnL w="12700" cap="flat" cmpd="sng" algn="ctr">
+                      <a:solidFill>
+                        <a:schemeClr val="tx1"/>
+                      </a:solidFill>
+                      <a:prstDash val="solid"/>
+                      <a:round/>
+                      <a:headEnd type="none" w="med" len="med"/>
+                      <a:tailEnd type="none" w="med" len="med"/>
+                    </a:lnL>
+                    <a:lnR w="12700" cap="flat" cmpd="sng" algn="ctr">
+                      <a:solidFill>
+                        <a:schemeClr val="tx1"/>
+                      </a:solidFill>
+                      <a:prstDash val="solid"/>
+                      <a:round/>
+                      <a:headEnd type="none" w="med" len="med"/>
+                      <a:tailEnd type="none" w="med" len="med"/>
+                    </a:lnR>
+                    <a:lnT w="12700" cap="flat" cmpd="sng" algn="ctr">
+                      <a:solidFill>
+                        <a:schemeClr val="tx1"/>
+                      </a:solidFill>
+                      <a:prstDash val="solid"/>
+                      <a:round/>
+                      <a:headEnd type="none" w="med" len="med"/>
+                      <a:tailEnd type="none" w="med" len="med"/>
+                    </a:lnT>
+                    <a:lnB w="12700" cap="flat" cmpd="sng" algn="ctr">
+                      <a:solidFill>
+                        <a:schemeClr val="tx1"/>
+                      </a:solidFill>
+                      <a:prstDash val="solid"/>
+                      <a:round/>
+                      <a:headEnd type="none" w="med" len="med"/>
+                      <a:tailEnd type="none" w="med" len="med"/>
+                    </a:lnB>
+                    <a:solidFill>
+                      <a:srgbClr val="0E2841"/>
+                    </a:solidFill>
+                  </a:tcPr>
+                </a:tc>
+                <a:tc>
+                  <a:txBody>
+                    <a:bodyPr/>
+                    <a:lstStyle/>
+                    <a:p>
+                      <a:pPr marL="0" indent="0" algn="l">
+                        <a:buNone/>
+                      </a:pPr>
+                      <a:r>
+                        <a:rPr lang="en-US" sz="1200" b="1" dirty="0">
+                          <a:solidFill>
+                            <a:srgbClr val="FFFFFF"/>
+                          </a:solidFill>
+                          <a:latin typeface="+mn-lt"/>
+                          <a:ea typeface="Calibri" pitchFamily="34" charset="-122"/>
+                          <a:cs typeface="Calibri" pitchFamily="34" charset="-120"/>
+                        </a:rPr>
+                        <a:t>Justificativa</a:t>
+                      </a:r>
+                      <a:endParaRPr lang="en-US" sz="1200" dirty="0">
+                        <a:latin typeface="+mn-lt"/>
+                        <a:ea typeface="Calibri" charset="0"/>
+                        <a:cs typeface="Calibri" charset="0"/>
+                      </a:endParaRPr>
+                    </a:p>
+                  </a:txBody>
+                  <a:tcPr marL="50800" marR="50800" marT="38100" marB="38100" anchor="ctr">
+                    <a:lnL w="12700" cap="flat" cmpd="sng" algn="ctr">
+                      <a:solidFill>
+                        <a:schemeClr val="tx1"/>
+                      </a:solidFill>
+                      <a:prstDash val="solid"/>
+                      <a:round/>
+                      <a:headEnd type="none" w="med" len="med"/>
+                      <a:tailEnd type="none" w="med" len="med"/>
+                    </a:lnL>
+                    <a:lnR w="12700" cap="flat" cmpd="sng" algn="ctr">
+                      <a:solidFill>
+                        <a:schemeClr val="tx1"/>
+                      </a:solidFill>
+                      <a:prstDash val="solid"/>
+                      <a:round/>
+                      <a:headEnd type="none" w="med" len="med"/>
+                      <a:tailEnd type="none" w="med" len="med"/>
+                    </a:lnR>
+                    <a:lnT w="12700" cap="flat" cmpd="sng" algn="ctr">
+                      <a:solidFill>
+                        <a:schemeClr val="tx1"/>
+                      </a:solidFill>
+                      <a:prstDash val="solid"/>
+                      <a:round/>
+                      <a:headEnd type="none" w="med" len="med"/>
+                      <a:tailEnd type="none" w="med" len="med"/>
+                    </a:lnT>
+                    <a:lnB w="12700" cap="flat" cmpd="sng" algn="ctr">
+                      <a:solidFill>
+                        <a:schemeClr val="tx1"/>
+                      </a:solidFill>
+                      <a:prstDash val="solid"/>
+                      <a:round/>
+                      <a:headEnd type="none" w="med" len="med"/>
+                      <a:tailEnd type="none" w="med" len="med"/>
+                    </a:lnB>
+                    <a:solidFill>
+                      <a:srgbClr val="0E2841"/>
+                    </a:solidFill>
+                  </a:tcPr>
+                </a:tc>
+                <a:extLst>
+                  <a:ext uri="{0D108BD9-81ED-4DB2-BD59-A6C34878D82A}">
+                    <a16:rowId xmlns:a16="http://schemas.microsoft.com/office/drawing/2014/main" val="10000"/>
+                  </a:ext>
+                </a:extLst>
+              </a:tr>
+              <a:tr h="450807">
+                <a:tc>
+                  <a:txBody>
+                    <a:bodyPr/>
+                    <a:lstStyle/>
+                    <a:p>
+                      <a:pPr marL="0" indent="0">
+                        <a:buNone/>
+                      </a:pPr>
+                      <a:r>
+                        <a:rPr lang="en-US" sz="1100" b="1" dirty="0">
+                          <a:solidFill>
+                            <a:srgbClr val="0E2841"/>
+                          </a:solidFill>
+                          <a:latin typeface="+mn-lt"/>
+                          <a:ea typeface="Calibri" pitchFamily="34" charset="-122"/>
+                          <a:cs typeface="Calibri" pitchFamily="34" charset="-120"/>
+                        </a:rPr>
+                        <a:t>Estados psicológicos profundos</a:t>
+                      </a:r>
+                      <a:endParaRPr lang="en-US" sz="1100" dirty="0">
+                        <a:latin typeface="+mn-lt"/>
+                        <a:ea typeface="Calibri" charset="0"/>
+                        <a:cs typeface="Calibri" charset="0"/>
+                      </a:endParaRPr>
+                    </a:p>
+                  </a:txBody>
+                  <a:tcPr marL="50800" marR="50800" marT="38100" marB="38100" anchor="ctr">
+                    <a:lnL w="12700" cap="flat" cmpd="sng" algn="ctr">
+                      <a:solidFill>
+                        <a:schemeClr val="tx1"/>
+                      </a:solidFill>
+                      <a:prstDash val="solid"/>
+                      <a:round/>
+                      <a:headEnd type="none" w="med" len="med"/>
+                      <a:tailEnd type="none" w="med" len="med"/>
+                    </a:lnL>
+                    <a:lnR w="12700" cap="flat" cmpd="sng" algn="ctr">
+                      <a:solidFill>
+                        <a:schemeClr val="tx1"/>
+                      </a:solidFill>
+                      <a:prstDash val="solid"/>
+                      <a:round/>
+                      <a:headEnd type="none" w="med" len="med"/>
+                      <a:tailEnd type="none" w="med" len="med"/>
+                    </a:lnR>
+                    <a:lnT w="12700" cap="flat" cmpd="sng" algn="ctr">
+                      <a:solidFill>
+                        <a:schemeClr val="tx1"/>
+                      </a:solidFill>
+                      <a:prstDash val="solid"/>
+                      <a:round/>
+                      <a:headEnd type="none" w="med" len="med"/>
+                      <a:tailEnd type="none" w="med" len="med"/>
+                    </a:lnT>
+                    <a:lnB w="12700" cap="flat" cmpd="sng" algn="ctr">
+                      <a:solidFill>
+                        <a:schemeClr val="tx1"/>
+                      </a:solidFill>
+                      <a:prstDash val="solid"/>
+                      <a:round/>
+                      <a:headEnd type="none" w="med" len="med"/>
+                      <a:tailEnd type="none" w="med" len="med"/>
+                    </a:lnB>
+                    <a:solidFill>
+                      <a:srgbClr val="E8E8E8"/>
+                    </a:solidFill>
+                  </a:tcPr>
+                </a:tc>
+                <a:tc>
+                  <a:txBody>
+                    <a:bodyPr/>
+                    <a:lstStyle/>
+                    <a:p>
+                      <a:pPr marL="0" indent="0">
+                        <a:buNone/>
+                      </a:pPr>
+                      <a:r>
+                        <a:rPr lang="en-US" sz="1100" dirty="0">
+                          <a:solidFill>
+                            <a:srgbClr val="4A5568"/>
+                          </a:solidFill>
+                          <a:latin typeface="+mn-lt"/>
+                          <a:ea typeface="Calibri" pitchFamily="34" charset="-122"/>
+                          <a:cs typeface="Calibri" pitchFamily="34" charset="-120"/>
+                        </a:rPr>
+                        <a:t>Inobserváveis; pânico é operacionalizado como variável [0,1]</a:t>
+                      </a:r>
+                      <a:endParaRPr lang="en-US" sz="1100" dirty="0">
+                        <a:latin typeface="+mn-lt"/>
+                        <a:ea typeface="Calibri" charset="0"/>
+                        <a:cs typeface="Calibri" charset="0"/>
+                      </a:endParaRPr>
+                    </a:p>
+                  </a:txBody>
+                  <a:tcPr marL="50800" marR="50800" marT="38100" marB="38100" anchor="ctr">
+                    <a:lnL w="12700" cap="flat" cmpd="sng" algn="ctr">
+                      <a:solidFill>
+                        <a:schemeClr val="tx1"/>
+                      </a:solidFill>
+                      <a:prstDash val="solid"/>
+                      <a:round/>
+                      <a:headEnd type="none" w="med" len="med"/>
+                      <a:tailEnd type="none" w="med" len="med"/>
+                    </a:lnL>
+                    <a:lnR w="12700" cap="flat" cmpd="sng" algn="ctr">
+                      <a:solidFill>
+                        <a:schemeClr val="tx1"/>
+                      </a:solidFill>
+                      <a:prstDash val="solid"/>
+                      <a:round/>
+                      <a:headEnd type="none" w="med" len="med"/>
+                      <a:tailEnd type="none" w="med" len="med"/>
+                    </a:lnR>
+                    <a:lnT w="12700" cap="flat" cmpd="sng" algn="ctr">
+                      <a:solidFill>
+                        <a:schemeClr val="tx1"/>
+                      </a:solidFill>
+                      <a:prstDash val="solid"/>
+                      <a:round/>
+                      <a:headEnd type="none" w="med" len="med"/>
+                      <a:tailEnd type="none" w="med" len="med"/>
+                    </a:lnT>
+                    <a:lnB w="12700" cap="flat" cmpd="sng" algn="ctr">
+                      <a:solidFill>
+                        <a:schemeClr val="tx1"/>
+                      </a:solidFill>
+                      <a:prstDash val="solid"/>
+                      <a:round/>
+                      <a:headEnd type="none" w="med" len="med"/>
+                      <a:tailEnd type="none" w="med" len="med"/>
+                    </a:lnB>
+                    <a:solidFill>
+                      <a:srgbClr val="E8E8E8"/>
+                    </a:solidFill>
+                  </a:tcPr>
+                </a:tc>
+                <a:extLst>
+                  <a:ext uri="{0D108BD9-81ED-4DB2-BD59-A6C34878D82A}">
+                    <a16:rowId xmlns:a16="http://schemas.microsoft.com/office/drawing/2014/main" val="10001"/>
+                  </a:ext>
+                </a:extLst>
+              </a:tr>
+              <a:tr h="450807">
+                <a:tc>
+                  <a:txBody>
+                    <a:bodyPr/>
+                    <a:lstStyle/>
+                    <a:p>
+                      <a:pPr marL="0" indent="0">
+                        <a:buNone/>
+                      </a:pPr>
+                      <a:r>
+                        <a:rPr lang="en-US" sz="1100" b="1" dirty="0">
+                          <a:solidFill>
+                            <a:srgbClr val="0E2841"/>
+                          </a:solidFill>
+                          <a:latin typeface="+mn-lt"/>
+                          <a:ea typeface="Calibri" pitchFamily="34" charset="-122"/>
+                          <a:cs typeface="Calibri" pitchFamily="34" charset="-120"/>
+                        </a:rPr>
+                        <a:t>Condições climáticas externas</a:t>
+                      </a:r>
+                      <a:endParaRPr lang="en-US" sz="1100" dirty="0">
+                        <a:latin typeface="+mn-lt"/>
+                        <a:ea typeface="Calibri" charset="0"/>
+                        <a:cs typeface="Calibri" charset="0"/>
+                      </a:endParaRPr>
+                    </a:p>
+                  </a:txBody>
+                  <a:tcPr marL="50800" marR="50800" marT="38100" marB="38100" anchor="ctr">
+                    <a:lnL w="12700" cap="flat" cmpd="sng" algn="ctr">
+                      <a:solidFill>
+                        <a:schemeClr val="tx1"/>
+                      </a:solidFill>
+                      <a:prstDash val="solid"/>
+                      <a:round/>
+                      <a:headEnd type="none" w="med" len="med"/>
+                      <a:tailEnd type="none" w="med" len="med"/>
+                    </a:lnL>
+                    <a:lnR w="12700" cap="flat" cmpd="sng" algn="ctr">
+                      <a:solidFill>
+                        <a:schemeClr val="tx1"/>
+                      </a:solidFill>
+                      <a:prstDash val="solid"/>
+                      <a:round/>
+                      <a:headEnd type="none" w="med" len="med"/>
+                      <a:tailEnd type="none" w="med" len="med"/>
+                    </a:lnR>
+                    <a:lnT w="12700" cap="flat" cmpd="sng" algn="ctr">
+                      <a:solidFill>
+                        <a:schemeClr val="tx1"/>
+                      </a:solidFill>
+                      <a:prstDash val="solid"/>
+                      <a:round/>
+                      <a:headEnd type="none" w="med" len="med"/>
+                      <a:tailEnd type="none" w="med" len="med"/>
+                    </a:lnT>
+                    <a:lnB w="12700" cap="flat" cmpd="sng" algn="ctr">
+                      <a:solidFill>
+                        <a:schemeClr val="tx1"/>
+                      </a:solidFill>
+                      <a:prstDash val="solid"/>
+                      <a:round/>
+                      <a:headEnd type="none" w="med" len="med"/>
+                      <a:tailEnd type="none" w="med" len="med"/>
+                    </a:lnB>
+                    <a:solidFill>
+                      <a:srgbClr val="EDF2F7"/>
+                    </a:solidFill>
+                  </a:tcPr>
+                </a:tc>
+                <a:tc>
+                  <a:txBody>
+                    <a:bodyPr/>
+                    <a:lstStyle/>
+                    <a:p>
+                      <a:pPr marL="0" indent="0">
+                        <a:buNone/>
+                      </a:pPr>
+                      <a:r>
+                        <a:rPr lang="en-US" sz="1100" dirty="0">
+                          <a:solidFill>
+                            <a:srgbClr val="4A5568"/>
+                          </a:solidFill>
+                          <a:latin typeface="+mn-lt"/>
+                          <a:ea typeface="Calibri" pitchFamily="34" charset="-122"/>
+                          <a:cs typeface="Calibri" pitchFamily="34" charset="-120"/>
+                        </a:rPr>
+                        <a:t>Foco no interior do edifício; vento e chuva não modelados</a:t>
+                      </a:r>
+                      <a:endParaRPr lang="en-US" sz="1100" dirty="0">
+                        <a:latin typeface="+mn-lt"/>
+                        <a:ea typeface="Calibri" charset="0"/>
+                        <a:cs typeface="Calibri" charset="0"/>
+                      </a:endParaRPr>
+                    </a:p>
+                  </a:txBody>
+                  <a:tcPr marL="50800" marR="50800" marT="38100" marB="38100" anchor="ctr">
+                    <a:lnL w="12700" cap="flat" cmpd="sng" algn="ctr">
+                      <a:solidFill>
+                        <a:schemeClr val="tx1"/>
+                      </a:solidFill>
+                      <a:prstDash val="solid"/>
+                      <a:round/>
+                      <a:headEnd type="none" w="med" len="med"/>
+                      <a:tailEnd type="none" w="med" len="med"/>
+                    </a:lnL>
+                    <a:lnR w="12700" cap="flat" cmpd="sng" algn="ctr">
+                      <a:solidFill>
+                        <a:schemeClr val="tx1"/>
+                      </a:solidFill>
+                      <a:prstDash val="solid"/>
+                      <a:round/>
+                      <a:headEnd type="none" w="med" len="med"/>
+                      <a:tailEnd type="none" w="med" len="med"/>
+                    </a:lnR>
+                    <a:lnT w="12700" cap="flat" cmpd="sng" algn="ctr">
+                      <a:solidFill>
+                        <a:schemeClr val="tx1"/>
+                      </a:solidFill>
+                      <a:prstDash val="solid"/>
+                      <a:round/>
+                      <a:headEnd type="none" w="med" len="med"/>
+                      <a:tailEnd type="none" w="med" len="med"/>
+                    </a:lnT>
+                    <a:lnB w="12700" cap="flat" cmpd="sng" algn="ctr">
+                      <a:solidFill>
+                        <a:schemeClr val="tx1"/>
+                      </a:solidFill>
+                      <a:prstDash val="solid"/>
+                      <a:round/>
+                      <a:headEnd type="none" w="med" len="med"/>
+                      <a:tailEnd type="none" w="med" len="med"/>
+                    </a:lnB>
+                    <a:solidFill>
+                      <a:srgbClr val="EDF2F7"/>
+                    </a:solidFill>
+                  </a:tcPr>
+                </a:tc>
+                <a:extLst>
+                  <a:ext uri="{0D108BD9-81ED-4DB2-BD59-A6C34878D82A}">
+                    <a16:rowId xmlns:a16="http://schemas.microsoft.com/office/drawing/2014/main" val="10002"/>
+                  </a:ext>
+                </a:extLst>
+              </a:tr>
+              <a:tr h="533850">
+                <a:tc>
+                  <a:txBody>
+                    <a:bodyPr/>
+                    <a:lstStyle/>
+                    <a:p>
+                      <a:pPr marL="0" indent="0">
+                        <a:buNone/>
+                      </a:pPr>
+                      <a:r>
+                        <a:rPr lang="en-US" sz="1100" b="1" dirty="0">
+                          <a:solidFill>
+                            <a:srgbClr val="0E2841"/>
+                          </a:solidFill>
+                          <a:latin typeface="+mn-lt"/>
+                          <a:ea typeface="Calibri" pitchFamily="34" charset="-122"/>
+                          <a:cs typeface="Calibri" pitchFamily="34" charset="-120"/>
+                        </a:rPr>
+                        <a:t>Políticas públicas / fiscalização</a:t>
+                      </a:r>
+                      <a:endParaRPr lang="en-US" sz="1100" dirty="0">
+                        <a:latin typeface="+mn-lt"/>
+                        <a:ea typeface="Calibri" charset="0"/>
+                        <a:cs typeface="Calibri" charset="0"/>
+                      </a:endParaRPr>
+                    </a:p>
+                  </a:txBody>
+                  <a:tcPr marL="50800" marR="50800" marT="38100" marB="38100" anchor="ctr">
+                    <a:lnL w="12700" cap="flat" cmpd="sng" algn="ctr">
+                      <a:solidFill>
+                        <a:schemeClr val="tx1"/>
+                      </a:solidFill>
+                      <a:prstDash val="solid"/>
+                      <a:round/>
+                      <a:headEnd type="none" w="med" len="med"/>
+                      <a:tailEnd type="none" w="med" len="med"/>
+                    </a:lnL>
+                    <a:lnR w="12700" cap="flat" cmpd="sng" algn="ctr">
+                      <a:solidFill>
+                        <a:schemeClr val="tx1"/>
+                      </a:solidFill>
+                      <a:prstDash val="solid"/>
+                      <a:round/>
+                      <a:headEnd type="none" w="med" len="med"/>
+                      <a:tailEnd type="none" w="med" len="med"/>
+                    </a:lnR>
+                    <a:lnT w="12700" cap="flat" cmpd="sng" algn="ctr">
+                      <a:solidFill>
+                        <a:schemeClr val="tx1"/>
+                      </a:solidFill>
+                      <a:prstDash val="solid"/>
+                      <a:round/>
+                      <a:headEnd type="none" w="med" len="med"/>
+                      <a:tailEnd type="none" w="med" len="med"/>
+                    </a:lnT>
+                    <a:lnB w="12700" cap="flat" cmpd="sng" algn="ctr">
+                      <a:solidFill>
+                        <a:schemeClr val="tx1"/>
+                      </a:solidFill>
+                      <a:prstDash val="solid"/>
+                      <a:round/>
+                      <a:headEnd type="none" w="med" len="med"/>
+                      <a:tailEnd type="none" w="med" len="med"/>
+                    </a:lnB>
+                    <a:solidFill>
+                      <a:srgbClr val="E8E8E8"/>
+                    </a:solidFill>
+                  </a:tcPr>
+                </a:tc>
+                <a:tc>
+                  <a:txBody>
+                    <a:bodyPr/>
+                    <a:lstStyle/>
+                    <a:p>
+                      <a:pPr marL="0" indent="0">
+                        <a:buNone/>
+                      </a:pPr>
+                      <a:r>
+                        <a:rPr lang="en-US" sz="1100" dirty="0">
+                          <a:solidFill>
+                            <a:srgbClr val="4A5568"/>
+                          </a:solidFill>
+                          <a:latin typeface="+mn-lt"/>
+                          <a:ea typeface="Calibri" pitchFamily="34" charset="-122"/>
+                          <a:cs typeface="Calibri" pitchFamily="34" charset="-120"/>
+                        </a:rPr>
+                        <a:t>Regime causal institucional incompatível com ontologia física</a:t>
+                      </a:r>
+                      <a:endParaRPr lang="en-US" sz="1100" dirty="0">
+                        <a:latin typeface="+mn-lt"/>
+                        <a:ea typeface="Calibri" charset="0"/>
+                        <a:cs typeface="Calibri" charset="0"/>
+                      </a:endParaRPr>
+                    </a:p>
+                  </a:txBody>
+                  <a:tcPr marL="50800" marR="50800" marT="38100" marB="38100" anchor="ctr">
+                    <a:lnL w="12700" cap="flat" cmpd="sng" algn="ctr">
+                      <a:solidFill>
+                        <a:schemeClr val="tx1"/>
+                      </a:solidFill>
+                      <a:prstDash val="solid"/>
+                      <a:round/>
+                      <a:headEnd type="none" w="med" len="med"/>
+                      <a:tailEnd type="none" w="med" len="med"/>
+                    </a:lnL>
+                    <a:lnR w="12700" cap="flat" cmpd="sng" algn="ctr">
+                      <a:solidFill>
+                        <a:schemeClr val="tx1"/>
+                      </a:solidFill>
+                      <a:prstDash val="solid"/>
+                      <a:round/>
+                      <a:headEnd type="none" w="med" len="med"/>
+                      <a:tailEnd type="none" w="med" len="med"/>
+                    </a:lnR>
+                    <a:lnT w="12700" cap="flat" cmpd="sng" algn="ctr">
+                      <a:solidFill>
+                        <a:schemeClr val="tx1"/>
+                      </a:solidFill>
+                      <a:prstDash val="solid"/>
+                      <a:round/>
+                      <a:headEnd type="none" w="med" len="med"/>
+                      <a:tailEnd type="none" w="med" len="med"/>
+                    </a:lnT>
+                    <a:lnB w="12700" cap="flat" cmpd="sng" algn="ctr">
+                      <a:solidFill>
+                        <a:schemeClr val="tx1"/>
+                      </a:solidFill>
+                      <a:prstDash val="solid"/>
+                      <a:round/>
+                      <a:headEnd type="none" w="med" len="med"/>
+                      <a:tailEnd type="none" w="med" len="med"/>
+                    </a:lnB>
+                    <a:solidFill>
+                      <a:srgbClr val="E8E8E8"/>
+                    </a:solidFill>
+                  </a:tcPr>
+                </a:tc>
+                <a:extLst>
+                  <a:ext uri="{0D108BD9-81ED-4DB2-BD59-A6C34878D82A}">
+                    <a16:rowId xmlns:a16="http://schemas.microsoft.com/office/drawing/2014/main" val="10003"/>
+                  </a:ext>
+                </a:extLst>
+              </a:tr>
+              <a:tr h="450807">
+                <a:tc>
+                  <a:txBody>
+                    <a:bodyPr/>
+                    <a:lstStyle/>
+                    <a:p>
+                      <a:pPr marL="0" indent="0">
+                        <a:buNone/>
+                      </a:pPr>
+                      <a:r>
+                        <a:rPr lang="en-US" sz="1100" b="1" dirty="0">
+                          <a:solidFill>
+                            <a:srgbClr val="0E2841"/>
+                          </a:solidFill>
+                          <a:latin typeface="+mn-lt"/>
+                          <a:ea typeface="Calibri" pitchFamily="34" charset="-122"/>
+                          <a:cs typeface="Calibri" pitchFamily="34" charset="-120"/>
+                        </a:rPr>
+                        <a:t>Dimensões simbólicas</a:t>
+                      </a:r>
+                      <a:endParaRPr lang="en-US" sz="1100" dirty="0">
+                        <a:latin typeface="+mn-lt"/>
+                        <a:ea typeface="Calibri" charset="0"/>
+                        <a:cs typeface="Calibri" charset="0"/>
+                      </a:endParaRPr>
+                    </a:p>
+                  </a:txBody>
+                  <a:tcPr marL="50800" marR="50800" marT="38100" marB="38100" anchor="ctr">
+                    <a:lnL w="12700" cap="flat" cmpd="sng" algn="ctr">
+                      <a:solidFill>
+                        <a:schemeClr val="tx1"/>
+                      </a:solidFill>
+                      <a:prstDash val="solid"/>
+                      <a:round/>
+                      <a:headEnd type="none" w="med" len="med"/>
+                      <a:tailEnd type="none" w="med" len="med"/>
+                    </a:lnL>
+                    <a:lnR w="12700" cap="flat" cmpd="sng" algn="ctr">
+                      <a:solidFill>
+                        <a:schemeClr val="tx1"/>
+                      </a:solidFill>
+                      <a:prstDash val="solid"/>
+                      <a:round/>
+                      <a:headEnd type="none" w="med" len="med"/>
+                      <a:tailEnd type="none" w="med" len="med"/>
+                    </a:lnR>
+                    <a:lnT w="12700" cap="flat" cmpd="sng" algn="ctr">
+                      <a:solidFill>
+                        <a:schemeClr val="tx1"/>
+                      </a:solidFill>
+                      <a:prstDash val="solid"/>
+                      <a:round/>
+                      <a:headEnd type="none" w="med" len="med"/>
+                      <a:tailEnd type="none" w="med" len="med"/>
+                    </a:lnT>
+                    <a:lnB w="12700" cap="flat" cmpd="sng" algn="ctr">
+                      <a:solidFill>
+                        <a:schemeClr val="tx1"/>
+                      </a:solidFill>
+                      <a:prstDash val="solid"/>
+                      <a:round/>
+                      <a:headEnd type="none" w="med" len="med"/>
+                      <a:tailEnd type="none" w="med" len="med"/>
+                    </a:lnB>
+                    <a:solidFill>
+                      <a:srgbClr val="EDF2F7"/>
+                    </a:solidFill>
+                  </a:tcPr>
+                </a:tc>
+                <a:tc>
+                  <a:txBody>
+                    <a:bodyPr/>
+                    <a:lstStyle/>
+                    <a:p>
+                      <a:pPr marL="0" indent="0">
+                        <a:buNone/>
+                      </a:pPr>
+                      <a:r>
+                        <a:rPr lang="en-US" sz="1100" dirty="0">
+                          <a:solidFill>
+                            <a:srgbClr val="4A5568"/>
+                          </a:solidFill>
+                          <a:latin typeface="+mn-lt"/>
+                          <a:ea typeface="Calibri" pitchFamily="34" charset="-122"/>
+                          <a:cs typeface="Calibri" pitchFamily="34" charset="-120"/>
+                        </a:rPr>
+                        <a:t>Percepção cultural de risco, crenças — não formalizáveis</a:t>
+                      </a:r>
+                      <a:endParaRPr lang="en-US" sz="1100" dirty="0">
+                        <a:latin typeface="+mn-lt"/>
+                        <a:ea typeface="Calibri" charset="0"/>
+                        <a:cs typeface="Calibri" charset="0"/>
+                      </a:endParaRPr>
+                    </a:p>
+                  </a:txBody>
+                  <a:tcPr marL="50800" marR="50800" marT="38100" marB="38100" anchor="ctr">
+                    <a:lnL w="12700" cap="flat" cmpd="sng" algn="ctr">
+                      <a:solidFill>
+                        <a:schemeClr val="tx1"/>
+                      </a:solidFill>
+                      <a:prstDash val="solid"/>
+                      <a:round/>
+                      <a:headEnd type="none" w="med" len="med"/>
+                      <a:tailEnd type="none" w="med" len="med"/>
+                    </a:lnL>
+                    <a:lnR w="12700" cap="flat" cmpd="sng" algn="ctr">
+                      <a:solidFill>
+                        <a:schemeClr val="tx1"/>
+                      </a:solidFill>
+                      <a:prstDash val="solid"/>
+                      <a:round/>
+                      <a:headEnd type="none" w="med" len="med"/>
+                      <a:tailEnd type="none" w="med" len="med"/>
+                    </a:lnR>
+                    <a:lnT w="12700" cap="flat" cmpd="sng" algn="ctr">
+                      <a:solidFill>
+                        <a:schemeClr val="tx1"/>
+                      </a:solidFill>
+                      <a:prstDash val="solid"/>
+                      <a:round/>
+                      <a:headEnd type="none" w="med" len="med"/>
+                      <a:tailEnd type="none" w="med" len="med"/>
+                    </a:lnT>
+                    <a:lnB w="12700" cap="flat" cmpd="sng" algn="ctr">
+                      <a:solidFill>
+                        <a:schemeClr val="tx1"/>
+                      </a:solidFill>
+                      <a:prstDash val="solid"/>
+                      <a:round/>
+                      <a:headEnd type="none" w="med" len="med"/>
+                      <a:tailEnd type="none" w="med" len="med"/>
+                    </a:lnB>
+                    <a:solidFill>
+                      <a:srgbClr val="EDF2F7"/>
+                    </a:solidFill>
+                  </a:tcPr>
+                </a:tc>
+                <a:extLst>
+                  <a:ext uri="{0D108BD9-81ED-4DB2-BD59-A6C34878D82A}">
+                    <a16:rowId xmlns:a16="http://schemas.microsoft.com/office/drawing/2014/main" val="10004"/>
+                  </a:ext>
+                </a:extLst>
+              </a:tr>
+              <a:tr h="450807">
+                <a:tc>
+                  <a:txBody>
+                    <a:bodyPr/>
+                    <a:lstStyle/>
+                    <a:p>
+                      <a:pPr marL="0" indent="0">
+                        <a:buNone/>
+                      </a:pPr>
+                      <a:r>
+                        <a:rPr lang="en-US" sz="1100" b="1" dirty="0">
+                          <a:solidFill>
+                            <a:srgbClr val="0E2841"/>
+                          </a:solidFill>
+                          <a:latin typeface="+mn-lt"/>
+                          <a:ea typeface="Calibri" pitchFamily="34" charset="-122"/>
+                          <a:cs typeface="Calibri" pitchFamily="34" charset="-120"/>
+                        </a:rPr>
+                        <a:t>Combate direto ao incêndio</a:t>
+                      </a:r>
+                      <a:endParaRPr lang="en-US" sz="1100" dirty="0">
+                        <a:latin typeface="+mn-lt"/>
+                        <a:ea typeface="Calibri" charset="0"/>
+                        <a:cs typeface="Calibri" charset="0"/>
+                      </a:endParaRPr>
+                    </a:p>
+                  </a:txBody>
+                  <a:tcPr marL="50800" marR="50800" marT="38100" marB="38100" anchor="ctr">
+                    <a:lnL w="12700" cap="flat" cmpd="sng" algn="ctr">
+                      <a:solidFill>
+                        <a:schemeClr val="tx1"/>
+                      </a:solidFill>
+                      <a:prstDash val="solid"/>
+                      <a:round/>
+                      <a:headEnd type="none" w="med" len="med"/>
+                      <a:tailEnd type="none" w="med" len="med"/>
+                    </a:lnL>
+                    <a:lnR w="12700" cap="flat" cmpd="sng" algn="ctr">
+                      <a:solidFill>
+                        <a:schemeClr val="tx1"/>
+                      </a:solidFill>
+                      <a:prstDash val="solid"/>
+                      <a:round/>
+                      <a:headEnd type="none" w="med" len="med"/>
+                      <a:tailEnd type="none" w="med" len="med"/>
+                    </a:lnR>
+                    <a:lnT w="12700" cap="flat" cmpd="sng" algn="ctr">
+                      <a:solidFill>
+                        <a:schemeClr val="tx1"/>
+                      </a:solidFill>
+                      <a:prstDash val="solid"/>
+                      <a:round/>
+                      <a:headEnd type="none" w="med" len="med"/>
+                      <a:tailEnd type="none" w="med" len="med"/>
+                    </a:lnT>
+                    <a:lnB w="12700" cap="flat" cmpd="sng" algn="ctr">
+                      <a:solidFill>
+                        <a:schemeClr val="tx1"/>
+                      </a:solidFill>
+                      <a:prstDash val="solid"/>
+                      <a:round/>
+                      <a:headEnd type="none" w="med" len="med"/>
+                      <a:tailEnd type="none" w="med" len="med"/>
+                    </a:lnB>
+                    <a:solidFill>
+                      <a:srgbClr val="E8E8E8"/>
+                    </a:solidFill>
+                  </a:tcPr>
+                </a:tc>
+                <a:tc>
+                  <a:txBody>
+                    <a:bodyPr/>
+                    <a:lstStyle/>
+                    <a:p>
+                      <a:pPr marL="0" indent="0">
+                        <a:buNone/>
+                      </a:pPr>
+                      <a:r>
+                        <a:rPr lang="en-US" sz="1100" dirty="0">
+                          <a:solidFill>
+                            <a:srgbClr val="4A5568"/>
+                          </a:solidFill>
+                          <a:latin typeface="+mn-lt"/>
+                          <a:ea typeface="Calibri" pitchFamily="34" charset="-122"/>
+                          <a:cs typeface="Calibri" pitchFamily="34" charset="-120"/>
+                        </a:rPr>
+                        <a:t>Brigadistas orientam evacuação, não combatem o fogo</a:t>
+                      </a:r>
+                      <a:endParaRPr lang="en-US" sz="1100" dirty="0">
+                        <a:latin typeface="+mn-lt"/>
+                        <a:ea typeface="Calibri" charset="0"/>
+                        <a:cs typeface="Calibri" charset="0"/>
+                      </a:endParaRPr>
+                    </a:p>
+                  </a:txBody>
+                  <a:tcPr marL="50800" marR="50800" marT="38100" marB="38100" anchor="ctr">
+                    <a:lnL w="12700" cap="flat" cmpd="sng" algn="ctr">
+                      <a:solidFill>
+                        <a:schemeClr val="tx1"/>
+                      </a:solidFill>
+                      <a:prstDash val="solid"/>
+                      <a:round/>
+                      <a:headEnd type="none" w="med" len="med"/>
+                      <a:tailEnd type="none" w="med" len="med"/>
+                    </a:lnL>
+                    <a:lnR w="12700" cap="flat" cmpd="sng" algn="ctr">
+                      <a:solidFill>
+                        <a:schemeClr val="tx1"/>
+                      </a:solidFill>
+                      <a:prstDash val="solid"/>
+                      <a:round/>
+                      <a:headEnd type="none" w="med" len="med"/>
+                      <a:tailEnd type="none" w="med" len="med"/>
+                    </a:lnR>
+                    <a:lnT w="12700" cap="flat" cmpd="sng" algn="ctr">
+                      <a:solidFill>
+                        <a:schemeClr val="tx1"/>
+                      </a:solidFill>
+                      <a:prstDash val="solid"/>
+                      <a:round/>
+                      <a:headEnd type="none" w="med" len="med"/>
+                      <a:tailEnd type="none" w="med" len="med"/>
+                    </a:lnT>
+                    <a:lnB w="12700" cap="flat" cmpd="sng" algn="ctr">
+                      <a:solidFill>
+                        <a:schemeClr val="tx1"/>
+                      </a:solidFill>
+                      <a:prstDash val="solid"/>
+                      <a:round/>
+                      <a:headEnd type="none" w="med" len="med"/>
+                      <a:tailEnd type="none" w="med" len="med"/>
+                    </a:lnB>
+                    <a:solidFill>
+                      <a:srgbClr val="E8E8E8"/>
+                    </a:solidFill>
+                  </a:tcPr>
+                </a:tc>
+                <a:extLst>
+                  <a:ext uri="{0D108BD9-81ED-4DB2-BD59-A6C34878D82A}">
+                    <a16:rowId xmlns:a16="http://schemas.microsoft.com/office/drawing/2014/main" val="10005"/>
+                  </a:ext>
+                </a:extLst>
+              </a:tr>
+              <a:tr h="450807">
+                <a:tc>
+                  <a:txBody>
+                    <a:bodyPr/>
+                    <a:lstStyle/>
+                    <a:p>
+                      <a:pPr marL="0" indent="0">
+                        <a:buNone/>
+                      </a:pPr>
+                      <a:r>
+                        <a:rPr lang="en-US" sz="1100" b="1" dirty="0">
+                          <a:solidFill>
+                            <a:srgbClr val="0E2841"/>
+                          </a:solidFill>
+                          <a:latin typeface="+mn-lt"/>
+                          <a:ea typeface="Calibri" pitchFamily="34" charset="-122"/>
+                          <a:cs typeface="Calibri" pitchFamily="34" charset="-120"/>
+                        </a:rPr>
+                        <a:t>Elevadores</a:t>
+                      </a:r>
+                      <a:endParaRPr lang="en-US" sz="1100" dirty="0">
+                        <a:latin typeface="+mn-lt"/>
+                        <a:ea typeface="Calibri" charset="0"/>
+                        <a:cs typeface="Calibri" charset="0"/>
+                      </a:endParaRPr>
+                    </a:p>
+                  </a:txBody>
+                  <a:tcPr marL="50800" marR="50800" marT="38100" marB="38100" anchor="ctr">
+                    <a:lnL w="12700" cap="flat" cmpd="sng" algn="ctr">
+                      <a:solidFill>
+                        <a:schemeClr val="tx1"/>
+                      </a:solidFill>
+                      <a:prstDash val="solid"/>
+                      <a:round/>
+                      <a:headEnd type="none" w="med" len="med"/>
+                      <a:tailEnd type="none" w="med" len="med"/>
+                    </a:lnL>
+                    <a:lnR w="12700" cap="flat" cmpd="sng" algn="ctr">
+                      <a:solidFill>
+                        <a:schemeClr val="tx1"/>
+                      </a:solidFill>
+                      <a:prstDash val="solid"/>
+                      <a:round/>
+                      <a:headEnd type="none" w="med" len="med"/>
+                      <a:tailEnd type="none" w="med" len="med"/>
+                    </a:lnR>
+                    <a:lnT w="12700" cap="flat" cmpd="sng" algn="ctr">
+                      <a:solidFill>
+                        <a:schemeClr val="tx1"/>
+                      </a:solidFill>
+                      <a:prstDash val="solid"/>
+                      <a:round/>
+                      <a:headEnd type="none" w="med" len="med"/>
+                      <a:tailEnd type="none" w="med" len="med"/>
+                    </a:lnT>
+                    <a:lnB w="12700" cap="flat" cmpd="sng" algn="ctr">
+                      <a:solidFill>
+                        <a:schemeClr val="tx1"/>
+                      </a:solidFill>
+                      <a:prstDash val="solid"/>
+                      <a:round/>
+                      <a:headEnd type="none" w="med" len="med"/>
+                      <a:tailEnd type="none" w="med" len="med"/>
+                    </a:lnB>
+                    <a:solidFill>
+                      <a:srgbClr val="EDF2F7"/>
+                    </a:solidFill>
+                  </a:tcPr>
+                </a:tc>
+                <a:tc>
+                  <a:txBody>
+                    <a:bodyPr/>
+                    <a:lstStyle/>
+                    <a:p>
+                      <a:pPr marL="0" indent="0">
+                        <a:buNone/>
+                      </a:pPr>
+                      <a:r>
+                        <a:rPr lang="en-US" sz="1100" dirty="0">
+                          <a:solidFill>
+                            <a:srgbClr val="4A5568"/>
+                          </a:solidFill>
+                          <a:latin typeface="+mn-lt"/>
+                          <a:ea typeface="Calibri" pitchFamily="34" charset="-122"/>
+                          <a:cs typeface="Calibri" pitchFamily="34" charset="-120"/>
+                        </a:rPr>
+                        <a:t>Bloqueados conforme ABNT NBR 9077 — não participam da evacuação</a:t>
+                      </a:r>
+                      <a:endParaRPr lang="en-US" sz="1100" dirty="0">
+                        <a:latin typeface="+mn-lt"/>
+                        <a:ea typeface="Calibri" charset="0"/>
+                        <a:cs typeface="Calibri" charset="0"/>
+                      </a:endParaRPr>
+                    </a:p>
+                  </a:txBody>
+                  <a:tcPr marL="50800" marR="50800" marT="38100" marB="38100" anchor="ctr">
+                    <a:lnL w="12700" cap="flat" cmpd="sng" algn="ctr">
+                      <a:solidFill>
+                        <a:schemeClr val="tx1"/>
+                      </a:solidFill>
+                      <a:prstDash val="solid"/>
+                      <a:round/>
+                      <a:headEnd type="none" w="med" len="med"/>
+                      <a:tailEnd type="none" w="med" len="med"/>
+                    </a:lnL>
+                    <a:lnR w="12700" cap="flat" cmpd="sng" algn="ctr">
+                      <a:solidFill>
+                        <a:schemeClr val="tx1"/>
+                      </a:solidFill>
+                      <a:prstDash val="solid"/>
+                      <a:round/>
+                      <a:headEnd type="none" w="med" len="med"/>
+                      <a:tailEnd type="none" w="med" len="med"/>
+                    </a:lnR>
+                    <a:lnT w="12700" cap="flat" cmpd="sng" algn="ctr">
+                      <a:solidFill>
+                        <a:schemeClr val="tx1"/>
+                      </a:solidFill>
+                      <a:prstDash val="solid"/>
+                      <a:round/>
+                      <a:headEnd type="none" w="med" len="med"/>
+                      <a:tailEnd type="none" w="med" len="med"/>
+                    </a:lnT>
+                    <a:lnB w="12700" cap="flat" cmpd="sng" algn="ctr">
+                      <a:solidFill>
+                        <a:schemeClr val="tx1"/>
+                      </a:solidFill>
+                      <a:prstDash val="solid"/>
+                      <a:round/>
+                      <a:headEnd type="none" w="med" len="med"/>
+                      <a:tailEnd type="none" w="med" len="med"/>
+                    </a:lnB>
+                    <a:solidFill>
+                      <a:srgbClr val="EDF2F7"/>
+                    </a:solidFill>
+                  </a:tcPr>
+                </a:tc>
+                <a:extLst>
+                  <a:ext uri="{0D108BD9-81ED-4DB2-BD59-A6C34878D82A}">
+                    <a16:rowId xmlns:a16="http://schemas.microsoft.com/office/drawing/2014/main" val="10006"/>
+                  </a:ext>
+                </a:extLst>
+              </a:tr>
+            </a:tbl>
+          </a:graphicData>
+        </a:graphic>
+      </p:graphicFrame>
+    </p:spTree>
+    <p:extLst>
+      <p:ext uri="{BB962C8B-B14F-4D97-AF65-F5344CB8AC3E}">
+        <p14:creationId xmlns:p14="http://schemas.microsoft.com/office/powerpoint/2010/main" val="2207557841"/>
+      </p:ext>
+    </p:extLst>
+  </p:cSld>
+  <p:clrMapOvr>
+    <a:masterClrMapping/>
+  </p:clrMapOvr>
+</p:sld>
+</file>
+
+<file path=ppt/slides/slide6.xml><?xml version="1.0" encoding="utf-8"?>
+<p:sld xmlns:a="http://schemas.openxmlformats.org/drawingml/2006/main" xmlns:r="http://schemas.openxmlformats.org/officeDocument/2006/relationships" xmlns:p="http://schemas.openxmlformats.org/presentationml/2006/main">
+  <p:cSld>
+    <p:spTree>
+      <p:nvGrpSpPr>
+        <p:cNvPr id="1" name="">
+          <a:extLst>
+            <a:ext uri="{FF2B5EF4-FFF2-40B4-BE49-F238E27FC236}">
               <a16:creationId xmlns:a16="http://schemas.microsoft.com/office/drawing/2014/main" id="{ECFA29C7-645E-D5F5-D652-B5F19447558E}"/>
             </a:ext>
           </a:extLst>
@@ -2646,7 +6720,7 @@
 </p:sld>
 </file>
 
-<file path=ppt/slides/slide5.xml><?xml version="1.0" encoding="utf-8"?>
+<file path=ppt/slides/slide7.xml><?xml version="1.0" encoding="utf-8"?>
 <p:sld xmlns:a="http://schemas.openxmlformats.org/drawingml/2006/main" xmlns:r="http://schemas.openxmlformats.org/officeDocument/2006/relationships" xmlns:p="http://schemas.openxmlformats.org/presentationml/2006/main">
   <p:cSld>
     <p:spTree>
@@ -2725,7 +6799,7 @@
 </p:sld>
 </file>
 
-<file path=ppt/slides/slide6.xml><?xml version="1.0" encoding="utf-8"?>
+<file path=ppt/slides/slide8.xml><?xml version="1.0" encoding="utf-8"?>
 <p:sld xmlns:a="http://schemas.openxmlformats.org/drawingml/2006/main" xmlns:r="http://schemas.openxmlformats.org/officeDocument/2006/relationships" xmlns:p="http://schemas.openxmlformats.org/presentationml/2006/main">
   <p:cSld>
     <p:spTree>
@@ -2804,7 +6878,7 @@
 </p:sld>
 </file>
 
-<file path=ppt/slides/slide7.xml><?xml version="1.0" encoding="utf-8"?>
+<file path=ppt/slides/slide9.xml><?xml version="1.0" encoding="utf-8"?>
 <p:sld xmlns:a="http://schemas.openxmlformats.org/drawingml/2006/main" xmlns:r="http://schemas.openxmlformats.org/officeDocument/2006/relationships" xmlns:p="http://schemas.openxmlformats.org/presentationml/2006/main">
   <p:cSld>
     <p:spTree>
@@ -2874,85 +6948,6 @@
     <p:extLst>
       <p:ext uri="{BB962C8B-B14F-4D97-AF65-F5344CB8AC3E}">
         <p14:creationId xmlns:p14="http://schemas.microsoft.com/office/powerpoint/2010/main" val="3743239919"/>
-      </p:ext>
-    </p:extLst>
-  </p:cSld>
-  <p:clrMapOvr>
-    <a:masterClrMapping/>
-  </p:clrMapOvr>
-</p:sld>
-</file>
-
-<file path=ppt/slides/slide8.xml><?xml version="1.0" encoding="utf-8"?>
-<p:sld xmlns:a="http://schemas.openxmlformats.org/drawingml/2006/main" xmlns:r="http://schemas.openxmlformats.org/officeDocument/2006/relationships" xmlns:p="http://schemas.openxmlformats.org/presentationml/2006/main">
-  <p:cSld>
-    <p:spTree>
-      <p:nvGrpSpPr>
-        <p:cNvPr id="1" name="">
-          <a:extLst>
-            <a:ext uri="{FF2B5EF4-FFF2-40B4-BE49-F238E27FC236}">
-              <a16:creationId xmlns:a16="http://schemas.microsoft.com/office/drawing/2014/main" id="{7B50B3F0-BC85-C350-CE74-951AA51A84DC}"/>
-            </a:ext>
-          </a:extLst>
-        </p:cNvPr>
-        <p:cNvGrpSpPr/>
-        <p:nvPr/>
-      </p:nvGrpSpPr>
-      <p:grpSpPr>
-        <a:xfrm>
-          <a:off x="0" y="0"/>
-          <a:ext cx="0" cy="0"/>
-          <a:chOff x="0" y="0"/>
-          <a:chExt cx="0" cy="0"/>
-        </a:xfrm>
-      </p:grpSpPr>
-      <p:sp>
-        <p:nvSpPr>
-          <p:cNvPr id="2" name="CaixaDeTexto 1">
-            <a:extLst>
-              <a:ext uri="{FF2B5EF4-FFF2-40B4-BE49-F238E27FC236}">
-                <a16:creationId xmlns:a16="http://schemas.microsoft.com/office/drawing/2014/main" id="{5168FC49-E03F-BACA-EC63-7EF8D148230E}"/>
-              </a:ext>
-            </a:extLst>
-          </p:cNvPr>
-          <p:cNvSpPr txBox="1"/>
-          <p:nvPr/>
-        </p:nvSpPr>
-        <p:spPr>
-          <a:xfrm>
-            <a:off x="2480387" y="2957805"/>
-            <a:ext cx="7231225" cy="769441"/>
-          </a:xfrm>
-          <a:prstGeom prst="rect">
-            <a:avLst/>
-          </a:prstGeom>
-          <a:noFill/>
-        </p:spPr>
-        <p:txBody>
-          <a:bodyPr wrap="square" rtlCol="0">
-            <a:spAutoFit/>
-          </a:bodyPr>
-          <a:lstStyle/>
-          <a:p>
-            <a:pPr algn="ctr"/>
-            <a:r>
-              <a:rPr lang="pt-BR" sz="4400" b="1" dirty="0">
-                <a:solidFill>
-                  <a:schemeClr val="tx2">
-                    <a:lumMod val="90000"/>
-                    <a:lumOff val="10000"/>
-                  </a:schemeClr>
-                </a:solidFill>
-              </a:rPr>
-              <a:t>6. Observação</a:t>
-            </a:r>
-          </a:p>
-        </p:txBody>
-      </p:sp>
-    </p:spTree>
-    <p:extLst>
-      <p:ext uri="{BB962C8B-B14F-4D97-AF65-F5344CB8AC3E}">
-        <p14:creationId xmlns:p14="http://schemas.microsoft.com/office/powerpoint/2010/main" val="3101183892"/>
       </p:ext>
     </p:extLst>
   </p:cSld>
